--- a/exports/pptx/lessons/senior-module-08-yoga/day-03-asana-patanjali.pptx
+++ b/exports/pptx/lessons/senior-module-08-yoga/day-03-asana-patanjali.pptx
@@ -16,9 +16,14 @@
     <p:sldId id="264" r:id="rId10"/>
     <p:sldId id="265" r:id="rId11"/>
     <p:sldId id="266" r:id="rId12"/>
+    <p:sldId id="267" r:id="rId13"/>
+    <p:sldId id="268" r:id="rId14"/>
+    <p:sldId id="269" r:id="rId15"/>
+    <p:sldId id="270" r:id="rId16"/>
+    <p:sldId id="271" r:id="rId17"/>
   </p:sldIdLst>
   <p:notesMasterIdLst>
-    <p:notesMasterId r:id="rId13"/>
+    <p:notesMasterId r:id="rId18"/>
   </p:notesMasterIdLst>
   <p:sldSz cx="9144000" cy="5143500"/>
   <p:notesSz cx="5143500" cy="9144000"/>
@@ -712,6 +717,446 @@
             <a:fld id="{F7021451-1387-4CA6-816F-3879F97B5CBC}" type="slidenum">
               <a:rPr lang="en-US"/>
               <a:t>11</a:t>
+            </a:fld>
+            <a:endParaRPr lang="en-US"/>
+          </a:p>
+        </p:txBody>
+      </p:sp>
+    </p:spTree>
+    <p:extLst>
+      <p:ext uri="{BB962C8B-B14F-4D97-AF65-F5344CB8AC3E}">
+        <p14:creationId xmlns:p14="http://schemas.microsoft.com/office/powerpoint/2010/main" val="1024086991"/>
+      </p:ext>
+    </p:extLst>
+  </p:cSld>
+  <p:clrMapOvr>
+    <a:masterClrMapping/>
+  </p:clrMapOvr>
+</p:notes>
+</file>
+
+<file path=ppt/notesSlides/notesSlide12.xml><?xml version="1.0" encoding="utf-8"?>
+<p:notes xmlns:a="http://schemas.openxmlformats.org/drawingml/2006/main" xmlns:r="http://schemas.openxmlformats.org/officeDocument/2006/relationships" xmlns:p="http://schemas.openxmlformats.org/presentationml/2006/main">
+  <p:cSld>
+    <p:spTree>
+      <p:nvGrpSpPr>
+        <p:cNvPr id="1" name=""/>
+        <p:cNvGrpSpPr/>
+        <p:nvPr/>
+      </p:nvGrpSpPr>
+      <p:grpSpPr>
+        <a:xfrm>
+          <a:off x="0" y="0"/>
+          <a:ext cx="0" cy="0"/>
+          <a:chOff x="0" y="0"/>
+          <a:chExt cx="0" cy="0"/>
+        </a:xfrm>
+      </p:grpSpPr>
+      <p:sp>
+        <p:nvSpPr>
+          <p:cNvPr id="2" name="Slide Image Placeholder 1"/>
+          <p:cNvSpPr>
+            <a:spLocks noGrp="1" noRot="1" noChangeAspect="1"/>
+          </p:cNvSpPr>
+          <p:nvPr>
+            <p:ph type="sldImg"/>
+          </p:nvPr>
+        </p:nvSpPr>
+        <p:spPr/>
+      </p:sp>
+      <p:sp>
+        <p:nvSpPr>
+          <p:cNvPr id="3" name="Notes Placeholder 2"/>
+          <p:cNvSpPr>
+            <a:spLocks noGrp="1"/>
+          </p:cNvSpPr>
+          <p:nvPr>
+            <p:ph type="body" idx="1"/>
+          </p:nvPr>
+        </p:nvSpPr>
+        <p:spPr/>
+        <p:txBody>
+          <a:bodyPr/>
+          <a:lstStyle/>
+          <a:p>
+            <a:r>
+              <a:rPr lang="en-US" dirty="0"/>
+              <a:t/>
+            </a:r>
+            <a:endParaRPr lang="en-US" dirty="0"/>
+          </a:p>
+        </p:txBody>
+      </p:sp>
+      <p:sp>
+        <p:nvSpPr>
+          <p:cNvPr id="4" name="Slide Number Placeholder 3"/>
+          <p:cNvSpPr>
+            <a:spLocks noGrp="1"/>
+          </p:cNvSpPr>
+          <p:nvPr>
+            <p:ph type="sldNum" sz="quarter" idx="10"/>
+          </p:nvPr>
+        </p:nvSpPr>
+        <p:spPr/>
+        <p:txBody>
+          <a:bodyPr/>
+          <a:lstStyle/>
+          <a:p>
+            <a:fld id="{F7021451-1387-4CA6-816F-3879F97B5CBC}" type="slidenum">
+              <a:rPr lang="en-US"/>
+              <a:t>12</a:t>
+            </a:fld>
+            <a:endParaRPr lang="en-US"/>
+          </a:p>
+        </p:txBody>
+      </p:sp>
+    </p:spTree>
+    <p:extLst>
+      <p:ext uri="{BB962C8B-B14F-4D97-AF65-F5344CB8AC3E}">
+        <p14:creationId xmlns:p14="http://schemas.microsoft.com/office/powerpoint/2010/main" val="1024086991"/>
+      </p:ext>
+    </p:extLst>
+  </p:cSld>
+  <p:clrMapOvr>
+    <a:masterClrMapping/>
+  </p:clrMapOvr>
+</p:notes>
+</file>
+
+<file path=ppt/notesSlides/notesSlide13.xml><?xml version="1.0" encoding="utf-8"?>
+<p:notes xmlns:a="http://schemas.openxmlformats.org/drawingml/2006/main" xmlns:r="http://schemas.openxmlformats.org/officeDocument/2006/relationships" xmlns:p="http://schemas.openxmlformats.org/presentationml/2006/main">
+  <p:cSld>
+    <p:spTree>
+      <p:nvGrpSpPr>
+        <p:cNvPr id="1" name=""/>
+        <p:cNvGrpSpPr/>
+        <p:nvPr/>
+      </p:nvGrpSpPr>
+      <p:grpSpPr>
+        <a:xfrm>
+          <a:off x="0" y="0"/>
+          <a:ext cx="0" cy="0"/>
+          <a:chOff x="0" y="0"/>
+          <a:chExt cx="0" cy="0"/>
+        </a:xfrm>
+      </p:grpSpPr>
+      <p:sp>
+        <p:nvSpPr>
+          <p:cNvPr id="2" name="Slide Image Placeholder 1"/>
+          <p:cNvSpPr>
+            <a:spLocks noGrp="1" noRot="1" noChangeAspect="1"/>
+          </p:cNvSpPr>
+          <p:nvPr>
+            <p:ph type="sldImg"/>
+          </p:nvPr>
+        </p:nvSpPr>
+        <p:spPr/>
+      </p:sp>
+      <p:sp>
+        <p:nvSpPr>
+          <p:cNvPr id="3" name="Notes Placeholder 2"/>
+          <p:cNvSpPr>
+            <a:spLocks noGrp="1"/>
+          </p:cNvSpPr>
+          <p:nvPr>
+            <p:ph type="body" idx="1"/>
+          </p:nvPr>
+        </p:nvSpPr>
+        <p:spPr/>
+        <p:txBody>
+          <a:bodyPr/>
+          <a:lstStyle/>
+          <a:p>
+            <a:r>
+              <a:rPr lang="en-US" dirty="0"/>
+              <a:t/>
+            </a:r>
+            <a:endParaRPr lang="en-US" dirty="0"/>
+          </a:p>
+        </p:txBody>
+      </p:sp>
+      <p:sp>
+        <p:nvSpPr>
+          <p:cNvPr id="4" name="Slide Number Placeholder 3"/>
+          <p:cNvSpPr>
+            <a:spLocks noGrp="1"/>
+          </p:cNvSpPr>
+          <p:nvPr>
+            <p:ph type="sldNum" sz="quarter" idx="10"/>
+          </p:nvPr>
+        </p:nvSpPr>
+        <p:spPr/>
+        <p:txBody>
+          <a:bodyPr/>
+          <a:lstStyle/>
+          <a:p>
+            <a:fld id="{F7021451-1387-4CA6-816F-3879F97B5CBC}" type="slidenum">
+              <a:rPr lang="en-US"/>
+              <a:t>13</a:t>
+            </a:fld>
+            <a:endParaRPr lang="en-US"/>
+          </a:p>
+        </p:txBody>
+      </p:sp>
+    </p:spTree>
+    <p:extLst>
+      <p:ext uri="{BB962C8B-B14F-4D97-AF65-F5344CB8AC3E}">
+        <p14:creationId xmlns:p14="http://schemas.microsoft.com/office/powerpoint/2010/main" val="1024086991"/>
+      </p:ext>
+    </p:extLst>
+  </p:cSld>
+  <p:clrMapOvr>
+    <a:masterClrMapping/>
+  </p:clrMapOvr>
+</p:notes>
+</file>
+
+<file path=ppt/notesSlides/notesSlide14.xml><?xml version="1.0" encoding="utf-8"?>
+<p:notes xmlns:a="http://schemas.openxmlformats.org/drawingml/2006/main" xmlns:r="http://schemas.openxmlformats.org/officeDocument/2006/relationships" xmlns:p="http://schemas.openxmlformats.org/presentationml/2006/main">
+  <p:cSld>
+    <p:spTree>
+      <p:nvGrpSpPr>
+        <p:cNvPr id="1" name=""/>
+        <p:cNvGrpSpPr/>
+        <p:nvPr/>
+      </p:nvGrpSpPr>
+      <p:grpSpPr>
+        <a:xfrm>
+          <a:off x="0" y="0"/>
+          <a:ext cx="0" cy="0"/>
+          <a:chOff x="0" y="0"/>
+          <a:chExt cx="0" cy="0"/>
+        </a:xfrm>
+      </p:grpSpPr>
+      <p:sp>
+        <p:nvSpPr>
+          <p:cNvPr id="2" name="Slide Image Placeholder 1"/>
+          <p:cNvSpPr>
+            <a:spLocks noGrp="1" noRot="1" noChangeAspect="1"/>
+          </p:cNvSpPr>
+          <p:nvPr>
+            <p:ph type="sldImg"/>
+          </p:nvPr>
+        </p:nvSpPr>
+        <p:spPr/>
+      </p:sp>
+      <p:sp>
+        <p:nvSpPr>
+          <p:cNvPr id="3" name="Notes Placeholder 2"/>
+          <p:cNvSpPr>
+            <a:spLocks noGrp="1"/>
+          </p:cNvSpPr>
+          <p:nvPr>
+            <p:ph type="body" idx="1"/>
+          </p:nvPr>
+        </p:nvSpPr>
+        <p:spPr/>
+        <p:txBody>
+          <a:bodyPr/>
+          <a:lstStyle/>
+          <a:p>
+            <a:r>
+              <a:rPr lang="en-US" dirty="0"/>
+              <a:t/>
+            </a:r>
+            <a:endParaRPr lang="en-US" dirty="0"/>
+          </a:p>
+        </p:txBody>
+      </p:sp>
+      <p:sp>
+        <p:nvSpPr>
+          <p:cNvPr id="4" name="Slide Number Placeholder 3"/>
+          <p:cNvSpPr>
+            <a:spLocks noGrp="1"/>
+          </p:cNvSpPr>
+          <p:nvPr>
+            <p:ph type="sldNum" sz="quarter" idx="10"/>
+          </p:nvPr>
+        </p:nvSpPr>
+        <p:spPr/>
+        <p:txBody>
+          <a:bodyPr/>
+          <a:lstStyle/>
+          <a:p>
+            <a:fld id="{F7021451-1387-4CA6-816F-3879F97B5CBC}" type="slidenum">
+              <a:rPr lang="en-US"/>
+              <a:t>14</a:t>
+            </a:fld>
+            <a:endParaRPr lang="en-US"/>
+          </a:p>
+        </p:txBody>
+      </p:sp>
+    </p:spTree>
+    <p:extLst>
+      <p:ext uri="{BB962C8B-B14F-4D97-AF65-F5344CB8AC3E}">
+        <p14:creationId xmlns:p14="http://schemas.microsoft.com/office/powerpoint/2010/main" val="1024086991"/>
+      </p:ext>
+    </p:extLst>
+  </p:cSld>
+  <p:clrMapOvr>
+    <a:masterClrMapping/>
+  </p:clrMapOvr>
+</p:notes>
+</file>
+
+<file path=ppt/notesSlides/notesSlide15.xml><?xml version="1.0" encoding="utf-8"?>
+<p:notes xmlns:a="http://schemas.openxmlformats.org/drawingml/2006/main" xmlns:r="http://schemas.openxmlformats.org/officeDocument/2006/relationships" xmlns:p="http://schemas.openxmlformats.org/presentationml/2006/main">
+  <p:cSld>
+    <p:spTree>
+      <p:nvGrpSpPr>
+        <p:cNvPr id="1" name=""/>
+        <p:cNvGrpSpPr/>
+        <p:nvPr/>
+      </p:nvGrpSpPr>
+      <p:grpSpPr>
+        <a:xfrm>
+          <a:off x="0" y="0"/>
+          <a:ext cx="0" cy="0"/>
+          <a:chOff x="0" y="0"/>
+          <a:chExt cx="0" cy="0"/>
+        </a:xfrm>
+      </p:grpSpPr>
+      <p:sp>
+        <p:nvSpPr>
+          <p:cNvPr id="2" name="Slide Image Placeholder 1"/>
+          <p:cNvSpPr>
+            <a:spLocks noGrp="1" noRot="1" noChangeAspect="1"/>
+          </p:cNvSpPr>
+          <p:nvPr>
+            <p:ph type="sldImg"/>
+          </p:nvPr>
+        </p:nvSpPr>
+        <p:spPr/>
+      </p:sp>
+      <p:sp>
+        <p:nvSpPr>
+          <p:cNvPr id="3" name="Notes Placeholder 2"/>
+          <p:cNvSpPr>
+            <a:spLocks noGrp="1"/>
+          </p:cNvSpPr>
+          <p:nvPr>
+            <p:ph type="body" idx="1"/>
+          </p:nvPr>
+        </p:nvSpPr>
+        <p:spPr/>
+        <p:txBody>
+          <a:bodyPr/>
+          <a:lstStyle/>
+          <a:p>
+            <a:r>
+              <a:rPr lang="en-US" dirty="0"/>
+              <a:t/>
+            </a:r>
+            <a:endParaRPr lang="en-US" dirty="0"/>
+          </a:p>
+        </p:txBody>
+      </p:sp>
+      <p:sp>
+        <p:nvSpPr>
+          <p:cNvPr id="4" name="Slide Number Placeholder 3"/>
+          <p:cNvSpPr>
+            <a:spLocks noGrp="1"/>
+          </p:cNvSpPr>
+          <p:nvPr>
+            <p:ph type="sldNum" sz="quarter" idx="10"/>
+          </p:nvPr>
+        </p:nvSpPr>
+        <p:spPr/>
+        <p:txBody>
+          <a:bodyPr/>
+          <a:lstStyle/>
+          <a:p>
+            <a:fld id="{F7021451-1387-4CA6-816F-3879F97B5CBC}" type="slidenum">
+              <a:rPr lang="en-US"/>
+              <a:t>15</a:t>
+            </a:fld>
+            <a:endParaRPr lang="en-US"/>
+          </a:p>
+        </p:txBody>
+      </p:sp>
+    </p:spTree>
+    <p:extLst>
+      <p:ext uri="{BB962C8B-B14F-4D97-AF65-F5344CB8AC3E}">
+        <p14:creationId xmlns:p14="http://schemas.microsoft.com/office/powerpoint/2010/main" val="1024086991"/>
+      </p:ext>
+    </p:extLst>
+  </p:cSld>
+  <p:clrMapOvr>
+    <a:masterClrMapping/>
+  </p:clrMapOvr>
+</p:notes>
+</file>
+
+<file path=ppt/notesSlides/notesSlide16.xml><?xml version="1.0" encoding="utf-8"?>
+<p:notes xmlns:a="http://schemas.openxmlformats.org/drawingml/2006/main" xmlns:r="http://schemas.openxmlformats.org/officeDocument/2006/relationships" xmlns:p="http://schemas.openxmlformats.org/presentationml/2006/main">
+  <p:cSld>
+    <p:spTree>
+      <p:nvGrpSpPr>
+        <p:cNvPr id="1" name=""/>
+        <p:cNvGrpSpPr/>
+        <p:nvPr/>
+      </p:nvGrpSpPr>
+      <p:grpSpPr>
+        <a:xfrm>
+          <a:off x="0" y="0"/>
+          <a:ext cx="0" cy="0"/>
+          <a:chOff x="0" y="0"/>
+          <a:chExt cx="0" cy="0"/>
+        </a:xfrm>
+      </p:grpSpPr>
+      <p:sp>
+        <p:nvSpPr>
+          <p:cNvPr id="2" name="Slide Image Placeholder 1"/>
+          <p:cNvSpPr>
+            <a:spLocks noGrp="1" noRot="1" noChangeAspect="1"/>
+          </p:cNvSpPr>
+          <p:nvPr>
+            <p:ph type="sldImg"/>
+          </p:nvPr>
+        </p:nvSpPr>
+        <p:spPr/>
+      </p:sp>
+      <p:sp>
+        <p:nvSpPr>
+          <p:cNvPr id="3" name="Notes Placeholder 2"/>
+          <p:cNvSpPr>
+            <a:spLocks noGrp="1"/>
+          </p:cNvSpPr>
+          <p:nvPr>
+            <p:ph type="body" idx="1"/>
+          </p:nvPr>
+        </p:nvSpPr>
+        <p:spPr/>
+        <p:txBody>
+          <a:bodyPr/>
+          <a:lstStyle/>
+          <a:p>
+            <a:r>
+              <a:rPr lang="en-US" dirty="0"/>
+              <a:t/>
+            </a:r>
+            <a:endParaRPr lang="en-US" dirty="0"/>
+          </a:p>
+        </p:txBody>
+      </p:sp>
+      <p:sp>
+        <p:nvSpPr>
+          <p:cNvPr id="4" name="Slide Number Placeholder 3"/>
+          <p:cNvSpPr>
+            <a:spLocks noGrp="1"/>
+          </p:cNvSpPr>
+          <p:nvPr>
+            <p:ph type="sldNum" sz="quarter" idx="10"/>
+          </p:nvPr>
+        </p:nvSpPr>
+        <p:spPr/>
+        <p:txBody>
+          <a:bodyPr/>
+          <a:lstStyle/>
+          <a:p>
+            <a:fld id="{F7021451-1387-4CA6-816F-3879F97B5CBC}" type="slidenum">
+              <a:rPr lang="en-US"/>
+              <a:t>16</a:t>
             </a:fld>
             <a:endParaRPr lang="en-US"/>
           </a:p>
@@ -1965,102 +2410,6 @@
         </p:nvSpPr>
         <p:spPr>
           <a:xfrm>
-            <a:off x="406301" y="1223963"/>
-            <a:ext cx="8498026" cy="274290"/>
-          </a:xfrm>
-          <a:prstGeom prst="rect">
-            <a:avLst/>
-          </a:prstGeom>
-          <a:noFill/>
-          <a:ln/>
-        </p:spPr>
-        <p:txBody>
-          <a:bodyPr wrap="square" lIns="0" tIns="0" rIns="0" bIns="0" rtlCol="0" anchor="t"/>
-          <a:lstStyle/>
-          <a:p>
-            <a:pPr algn="l" indent="0" marL="0">
-              <a:lnSpc>
-                <a:spcPts val="2160"/>
-              </a:lnSpc>
-              <a:spcBef>
-                <a:spcPts val="600"/>
-              </a:spcBef>
-              <a:spcAft>
-                <a:spcPts val="800"/>
-              </a:spcAft>
-              <a:buNone/>
-            </a:pPr>
-            <a:r>
-              <a:rPr lang="en-US" sz="1800" b="1" dirty="0">
-                <a:solidFill>
-                  <a:srgbClr val="997929"/>
-                </a:solidFill>
-                <a:latin typeface="Times New Roman" pitchFamily="34" charset="0"/>
-                <a:ea typeface="Times New Roman" pitchFamily="34" charset="-122"/>
-                <a:cs typeface="Times New Roman" pitchFamily="34" charset="-120"/>
-              </a:rPr>
-              <a:t>Learning objective</a:t>
-            </a:r>
-            <a:endParaRPr lang="en-US" sz="1800" dirty="0"/>
-          </a:p>
-        </p:txBody>
-      </p:sp>
-      <p:sp>
-        <p:nvSpPr>
-          <p:cNvPr id="6" name="Text 4"/>
-          <p:cNvSpPr/>
-          <p:nvPr/>
-        </p:nvSpPr>
-        <p:spPr>
-          <a:xfrm>
-            <a:off x="406301" y="1637854"/>
-            <a:ext cx="8498026" cy="426541"/>
-          </a:xfrm>
-          <a:prstGeom prst="rect">
-            <a:avLst/>
-          </a:prstGeom>
-          <a:noFill/>
-          <a:ln/>
-        </p:spPr>
-        <p:txBody>
-          <a:bodyPr wrap="square" lIns="0" tIns="0" rIns="0" bIns="0" rtlCol="0" anchor="t"/>
-          <a:lstStyle/>
-          <a:p>
-            <a:pPr algn="l" indent="0" marL="0">
-              <a:lnSpc>
-                <a:spcPts val="1680"/>
-              </a:lnSpc>
-              <a:spcBef>
-                <a:spcPts val="300"/>
-              </a:spcBef>
-              <a:spcAft>
-                <a:spcPts val="300"/>
-              </a:spcAft>
-              <a:buNone/>
-            </a:pPr>
-            <a:r>
-              <a:rPr lang="en-US" sz="1200" dirty="0">
-                <a:solidFill>
-                  <a:srgbClr val="1A1A1A"/>
-                </a:solidFill>
-                <a:latin typeface="Georgia" pitchFamily="34" charset="0"/>
-                <a:ea typeface="Georgia" pitchFamily="34" charset="-122"/>
-                <a:cs typeface="Georgia" pitchFamily="34" charset="-120"/>
-              </a:rPr>
-              <a:t>Students read YS 2.46–48 in IAST + translation, identify the dual condition for āsana (steady AND comfortable), and reflect on whether modern āsana practice meets Patañjali's criterion.</a:t>
-            </a:r>
-            <a:endParaRPr lang="en-US" sz="1200" dirty="0"/>
-          </a:p>
-        </p:txBody>
-      </p:sp>
-      <p:sp>
-        <p:nvSpPr>
-          <p:cNvPr id="7" name="Text 5"/>
-          <p:cNvSpPr/>
-          <p:nvPr/>
-        </p:nvSpPr>
-        <p:spPr>
-          <a:xfrm>
             <a:off x="406301" y="4434929"/>
             <a:ext cx="8498026" cy="213271"/>
           </a:xfrm>
@@ -2205,7 +2554,7 @@
                 <a:ea typeface="Times New Roman" pitchFamily="34" charset="-122"/>
                 <a:cs typeface="Times New Roman" pitchFamily="34" charset="-120"/>
               </a:rPr>
-              <a:t>Teacher notes</a:t>
+              <a:t>Practice (15 min) — Test the definition</a:t>
             </a:r>
             <a:endParaRPr lang="en-US" sz="1800" dirty="0"/>
           </a:p>
@@ -2220,7 +2569,7 @@
         <p:spPr>
           <a:xfrm>
             <a:off x="406301" y="870942"/>
-            <a:ext cx="8498026" cy="426541"/>
+            <a:ext cx="8498026" cy="213271"/>
           </a:xfrm>
           <a:prstGeom prst="rect">
             <a:avLst/>
@@ -2253,7 +2602,7 @@
                 <a:ea typeface="Georgia" pitchFamily="34" charset="-122"/>
                 <a:cs typeface="Georgia" pitchFamily="34" charset="-120"/>
               </a:rPr>
-              <a:t>– The dual criterion is genuinely counter-cultural to most modern yoga. Many studios push the "challenging hold" model. Patañjali doesn't. – The reflection writing often surfaces students' own conflicted relationship with effort vs ease.</a:t>
+              <a:t>Hold tāḍāsana for 60 sec. Notice:</a:t>
             </a:r>
             <a:endParaRPr lang="en-US" sz="1200" dirty="0"/>
           </a:p>
@@ -2262,6 +2611,276 @@
       <p:sp>
         <p:nvSpPr>
           <p:cNvPr id="5" name="Text 3"/>
+          <p:cNvSpPr/>
+          <p:nvPr/>
+        </p:nvSpPr>
+        <p:spPr>
+          <a:xfrm>
+            <a:off x="634901" y="1173063"/>
+            <a:ext cx="8102798" cy="769441"/>
+          </a:xfrm>
+          <a:prstGeom prst="rect">
+            <a:avLst/>
+          </a:prstGeom>
+          <a:noFill/>
+          <a:ln/>
+        </p:spPr>
+        <p:txBody>
+          <a:bodyPr wrap="square" lIns="0" tIns="0" rIns="0" bIns="0" rtlCol="0" anchor="t"/>
+          <a:lstStyle/>
+          <a:p>
+            <a:pPr algn="l" marL="342900" indent="-342900">
+              <a:lnSpc>
+                <a:spcPts val="1620"/>
+              </a:lnSpc>
+              <a:spcAft>
+                <a:spcPts val="300"/>
+              </a:spcAft>
+              <a:buSzPct val="100000"/>
+              <a:buChar char="•"/>
+            </a:pPr>
+            <a:r>
+              <a:rPr lang="en-US" sz="1200" dirty="0">
+                <a:solidFill>
+                  <a:srgbClr val="1A1A1A"/>
+                </a:solidFill>
+                <a:latin typeface="Georgia" pitchFamily="34" charset="0"/>
+                <a:ea typeface="Georgia" pitchFamily="34" charset="-122"/>
+                <a:cs typeface="Georgia" pitchFamily="34" charset="-120"/>
+              </a:rPr>
+              <a:t>Are you </a:t>
+            </a:r>
+            <a:pPr algn="l" indent="0" marL="0">
+              <a:lnSpc>
+                <a:spcPts val="1620"/>
+              </a:lnSpc>
+              <a:spcAft>
+                <a:spcPts val="300"/>
+              </a:spcAft>
+              <a:buNone/>
+            </a:pPr>
+            <a:r>
+              <a:rPr lang="en-US" sz="1200" i="1" dirty="0">
+                <a:solidFill>
+                  <a:srgbClr val="1A1A1A"/>
+                </a:solidFill>
+                <a:latin typeface="Georgia" pitchFamily="34" charset="0"/>
+                <a:ea typeface="Georgia" pitchFamily="34" charset="-122"/>
+                <a:cs typeface="Georgia" pitchFamily="34" charset="-120"/>
+              </a:rPr>
+              <a:t>sthira</a:t>
+            </a:r>
+            <a:pPr algn="l" indent="0" marL="0">
+              <a:lnSpc>
+                <a:spcPts val="1620"/>
+              </a:lnSpc>
+              <a:spcAft>
+                <a:spcPts val="300"/>
+              </a:spcAft>
+              <a:buNone/>
+            </a:pPr>
+            <a:r>
+              <a:rPr lang="en-US" sz="1200" dirty="0">
+                <a:solidFill>
+                  <a:srgbClr val="1A1A1A"/>
+                </a:solidFill>
+                <a:latin typeface="Georgia" pitchFamily="34" charset="0"/>
+                <a:ea typeface="Georgia" pitchFamily="34" charset="-122"/>
+                <a:cs typeface="Georgia" pitchFamily="34" charset="-120"/>
+              </a:rPr>
+              <a:t> (steady)?</a:t>
+            </a:r>
+            <a:endParaRPr lang="en-US" sz="1200" dirty="0"/>
+          </a:p>
+          <a:p>
+            <a:pPr algn="l" marL="342900" indent="-342900">
+              <a:lnSpc>
+                <a:spcPts val="1620"/>
+              </a:lnSpc>
+              <a:spcAft>
+                <a:spcPts val="300"/>
+              </a:spcAft>
+              <a:buSzPct val="100000"/>
+              <a:buChar char="•"/>
+            </a:pPr>
+            <a:r>
+              <a:rPr lang="en-US" sz="1200" dirty="0">
+                <a:solidFill>
+                  <a:srgbClr val="1A1A1A"/>
+                </a:solidFill>
+                <a:latin typeface="Georgia" pitchFamily="34" charset="0"/>
+                <a:ea typeface="Georgia" pitchFamily="34" charset="-122"/>
+                <a:cs typeface="Georgia" pitchFamily="34" charset="-120"/>
+              </a:rPr>
+              <a:t>Are you </a:t>
+            </a:r>
+            <a:pPr algn="l" indent="0" marL="0">
+              <a:lnSpc>
+                <a:spcPts val="1620"/>
+              </a:lnSpc>
+              <a:spcAft>
+                <a:spcPts val="300"/>
+              </a:spcAft>
+              <a:buNone/>
+            </a:pPr>
+            <a:r>
+              <a:rPr lang="en-US" sz="1200" i="1" dirty="0">
+                <a:solidFill>
+                  <a:srgbClr val="1A1A1A"/>
+                </a:solidFill>
+                <a:latin typeface="Georgia" pitchFamily="34" charset="0"/>
+                <a:ea typeface="Georgia" pitchFamily="34" charset="-122"/>
+                <a:cs typeface="Georgia" pitchFamily="34" charset="-120"/>
+              </a:rPr>
+              <a:t>sukha</a:t>
+            </a:r>
+            <a:pPr algn="l" indent="0" marL="0">
+              <a:lnSpc>
+                <a:spcPts val="1620"/>
+              </a:lnSpc>
+              <a:spcAft>
+                <a:spcPts val="300"/>
+              </a:spcAft>
+              <a:buNone/>
+            </a:pPr>
+            <a:r>
+              <a:rPr lang="en-US" sz="1200" dirty="0">
+                <a:solidFill>
+                  <a:srgbClr val="1A1A1A"/>
+                </a:solidFill>
+                <a:latin typeface="Georgia" pitchFamily="34" charset="0"/>
+                <a:ea typeface="Georgia" pitchFamily="34" charset="-122"/>
+                <a:cs typeface="Georgia" pitchFamily="34" charset="-120"/>
+              </a:rPr>
+              <a:t> (comfortable)?</a:t>
+            </a:r>
+            <a:endParaRPr lang="en-US" sz="1200" dirty="0"/>
+          </a:p>
+          <a:p>
+            <a:pPr algn="l" marL="342900" indent="-342900">
+              <a:lnSpc>
+                <a:spcPts val="1620"/>
+              </a:lnSpc>
+              <a:spcAft>
+                <a:spcPts val="300"/>
+              </a:spcAft>
+              <a:buSzPct val="100000"/>
+              <a:buChar char="•"/>
+            </a:pPr>
+            <a:r>
+              <a:rPr lang="en-US" sz="1200" dirty="0">
+                <a:solidFill>
+                  <a:srgbClr val="1A1A1A"/>
+                </a:solidFill>
+                <a:latin typeface="Georgia" pitchFamily="34" charset="0"/>
+                <a:ea typeface="Georgia" pitchFamily="34" charset="-122"/>
+                <a:cs typeface="Georgia" pitchFamily="34" charset="-120"/>
+              </a:rPr>
+              <a:t>Are you both?</a:t>
+            </a:r>
+            <a:endParaRPr lang="en-US" sz="1200" dirty="0"/>
+          </a:p>
+        </p:txBody>
+      </p:sp>
+      <p:sp>
+        <p:nvSpPr>
+          <p:cNvPr id="6" name="Text 4"/>
+          <p:cNvSpPr/>
+          <p:nvPr/>
+        </p:nvSpPr>
+        <p:spPr>
+          <a:xfrm>
+            <a:off x="406301" y="2031355"/>
+            <a:ext cx="8498026" cy="213271"/>
+          </a:xfrm>
+          <a:prstGeom prst="rect">
+            <a:avLst/>
+          </a:prstGeom>
+          <a:noFill/>
+          <a:ln/>
+        </p:spPr>
+        <p:txBody>
+          <a:bodyPr wrap="square" lIns="0" tIns="0" rIns="0" bIns="0" rtlCol="0" anchor="t"/>
+          <a:lstStyle/>
+          <a:p>
+            <a:pPr algn="l" indent="0" marL="0">
+              <a:lnSpc>
+                <a:spcPts val="1680"/>
+              </a:lnSpc>
+              <a:spcBef>
+                <a:spcPts val="300"/>
+              </a:spcBef>
+              <a:spcAft>
+                <a:spcPts val="300"/>
+              </a:spcAft>
+              <a:buNone/>
+            </a:pPr>
+            <a:r>
+              <a:rPr lang="en-US" sz="1200" dirty="0">
+                <a:solidFill>
+                  <a:srgbClr val="1A1A1A"/>
+                </a:solidFill>
+                <a:latin typeface="Georgia" pitchFamily="34" charset="0"/>
+                <a:ea typeface="Georgia" pitchFamily="34" charset="-122"/>
+                <a:cs typeface="Georgia" pitchFamily="34" charset="-120"/>
+              </a:rPr>
+              <a:t>Now hold vṛkṣāsana (right). Same questions.</a:t>
+            </a:r>
+            <a:endParaRPr lang="en-US" sz="1200" dirty="0"/>
+          </a:p>
+        </p:txBody>
+      </p:sp>
+      <p:sp>
+        <p:nvSpPr>
+          <p:cNvPr id="7" name="Text 5"/>
+          <p:cNvSpPr/>
+          <p:nvPr/>
+        </p:nvSpPr>
+        <p:spPr>
+          <a:xfrm>
+            <a:off x="406301" y="2320826"/>
+            <a:ext cx="8498026" cy="213271"/>
+          </a:xfrm>
+          <a:prstGeom prst="rect">
+            <a:avLst/>
+          </a:prstGeom>
+          <a:noFill/>
+          <a:ln/>
+        </p:spPr>
+        <p:txBody>
+          <a:bodyPr wrap="square" lIns="0" tIns="0" rIns="0" bIns="0" rtlCol="0" anchor="t"/>
+          <a:lstStyle/>
+          <a:p>
+            <a:pPr algn="l" indent="0" marL="0">
+              <a:lnSpc>
+                <a:spcPts val="1680"/>
+              </a:lnSpc>
+              <a:spcBef>
+                <a:spcPts val="300"/>
+              </a:spcBef>
+              <a:spcAft>
+                <a:spcPts val="300"/>
+              </a:spcAft>
+              <a:buNone/>
+            </a:pPr>
+            <a:r>
+              <a:rPr lang="en-US" sz="1200" dirty="0">
+                <a:solidFill>
+                  <a:srgbClr val="1A1A1A"/>
+                </a:solidFill>
+                <a:latin typeface="Georgia" pitchFamily="34" charset="0"/>
+                <a:ea typeface="Georgia" pitchFamily="34" charset="-122"/>
+                <a:cs typeface="Georgia" pitchFamily="34" charset="-120"/>
+              </a:rPr>
+              <a:t>Then balāsana for 90 sec. Same questions.</a:t>
+            </a:r>
+            <a:endParaRPr lang="en-US" sz="1200" dirty="0"/>
+          </a:p>
+        </p:txBody>
+      </p:sp>
+      <p:sp>
+        <p:nvSpPr>
+          <p:cNvPr id="8" name="Text 6"/>
           <p:cNvSpPr/>
           <p:nvPr/>
         </p:nvSpPr>
@@ -2411,7 +3030,7 @@
                 <a:ea typeface="Times New Roman" pitchFamily="34" charset="-122"/>
                 <a:cs typeface="Times New Roman" pitchFamily="34" charset="-120"/>
               </a:rPr>
-              <a:t>Citation(s) used</a:t>
+              <a:t>Practice (15 min) — Test the definition (cont.)</a:t>
             </a:r>
             <a:endParaRPr lang="en-US" sz="1800" dirty="0"/>
           </a:p>
@@ -2459,7 +3078,1184 @@
                 <a:ea typeface="Georgia" pitchFamily="34" charset="-122"/>
                 <a:cs typeface="Georgia" pitchFamily="34" charset="-120"/>
               </a:rPr>
-              <a:t>– Patañjali YS 2.46–48 — Bryant (2009), p. 282–286.</a:t>
+              <a:t>Discussion (in pairs, 2 min): which pose best met Patañjali's dual criterion for you, today?</a:t>
+            </a:r>
+            <a:endParaRPr lang="en-US" sz="1200" dirty="0"/>
+          </a:p>
+        </p:txBody>
+      </p:sp>
+      <p:sp>
+        <p:nvSpPr>
+          <p:cNvPr id="5" name="Text 3"/>
+          <p:cNvSpPr/>
+          <p:nvPr/>
+        </p:nvSpPr>
+        <p:spPr>
+          <a:xfrm>
+            <a:off x="406301" y="4434929"/>
+            <a:ext cx="8498026" cy="213271"/>
+          </a:xfrm>
+          <a:prstGeom prst="rect">
+            <a:avLst/>
+          </a:prstGeom>
+          <a:noFill/>
+          <a:ln/>
+        </p:spPr>
+        <p:txBody>
+          <a:bodyPr wrap="square" lIns="0" tIns="0" rIns="0" bIns="0" rtlCol="0" anchor="t"/>
+          <a:lstStyle/>
+          <a:p>
+            <a:pPr algn="l" indent="0" marL="0">
+              <a:lnSpc>
+                <a:spcPts val="1680"/>
+              </a:lnSpc>
+              <a:spcBef>
+                <a:spcPts val="300"/>
+              </a:spcBef>
+              <a:spcAft>
+                <a:spcPts val="300"/>
+              </a:spcAft>
+              <a:buNone/>
+            </a:pPr>
+            <a:r>
+              <a:rPr lang="en-US" sz="1200" dirty="0">
+                <a:solidFill>
+                  <a:srgbClr val="1A1A1A"/>
+                </a:solidFill>
+                <a:latin typeface="Georgia" pitchFamily="34" charset="0"/>
+                <a:ea typeface="Georgia" pitchFamily="34" charset="-122"/>
+                <a:cs typeface="Georgia" pitchFamily="34" charset="-120"/>
+              </a:rPr>
+              <a:t>Senior ·  · IKS Curriculum</a:t>
+            </a:r>
+            <a:endParaRPr lang="en-US" sz="1200" dirty="0"/>
+          </a:p>
+        </p:txBody>
+      </p:sp>
+    </p:spTree>
+  </p:cSld>
+  <p:clrMapOvr>
+    <a:masterClrMapping/>
+  </p:clrMapOvr>
+</p:sld>
+</file>
+
+<file path=ppt/slides/slide12.xml><?xml version="1.0" encoding="utf-8"?>
+<p:sld xmlns:a="http://schemas.openxmlformats.org/drawingml/2006/main" xmlns:r="http://schemas.openxmlformats.org/officeDocument/2006/relationships" xmlns:p="http://schemas.openxmlformats.org/presentationml/2006/main">
+  <p:cSld name="Slide 12">
+    <p:bg>
+      <p:bgPr>
+        <a:solidFill>
+          <a:srgbClr val="FAF7F2"/>
+        </a:solidFill>
+      </p:bgPr>
+    </p:bg>
+    <p:spTree>
+      <p:nvGrpSpPr>
+        <p:cNvPr id="1" name=""/>
+        <p:cNvGrpSpPr/>
+        <p:nvPr/>
+      </p:nvGrpSpPr>
+      <p:grpSpPr>
+        <a:xfrm>
+          <a:off x="0" y="0"/>
+          <a:ext cx="0" cy="0"/>
+          <a:chOff x="0" y="0"/>
+          <a:chExt cx="0" cy="0"/>
+        </a:xfrm>
+      </p:grpSpPr>
+      <p:sp>
+        <p:nvSpPr>
+          <p:cNvPr id="2" name="Text 0"/>
+          <p:cNvSpPr/>
+          <p:nvPr/>
+        </p:nvSpPr>
+        <p:spPr>
+          <a:xfrm>
+            <a:off x="0" y="0"/>
+            <a:ext cx="9144000" cy="101501"/>
+          </a:xfrm>
+          <a:prstGeom prst="rect">
+            <a:avLst/>
+          </a:prstGeom>
+          <a:solidFill>
+            <a:srgbClr val="5D1D2E"/>
+          </a:solidFill>
+          <a:ln/>
+        </p:spPr>
+        <p:txBody>
+          <a:bodyPr wrap="square" rtlCol="0" anchor="ctr"/>
+          <a:lstStyle/>
+          <a:p>
+            <a:pPr indent="0" marL="0">
+              <a:buNone/>
+            </a:pPr>
+            <a:endParaRPr lang="en-US" dirty="0"/>
+          </a:p>
+        </p:txBody>
+      </p:sp>
+      <p:sp>
+        <p:nvSpPr>
+          <p:cNvPr id="3" name="Text 1"/>
+          <p:cNvSpPr/>
+          <p:nvPr/>
+        </p:nvSpPr>
+        <p:spPr>
+          <a:xfrm>
+            <a:off x="406301" y="457051"/>
+            <a:ext cx="8498026" cy="274290"/>
+          </a:xfrm>
+          <a:prstGeom prst="rect">
+            <a:avLst/>
+          </a:prstGeom>
+          <a:noFill/>
+          <a:ln/>
+        </p:spPr>
+        <p:txBody>
+          <a:bodyPr wrap="square" lIns="0" tIns="0" rIns="0" bIns="0" rtlCol="0" anchor="t"/>
+          <a:lstStyle/>
+          <a:p>
+            <a:pPr algn="l" indent="0" marL="0">
+              <a:lnSpc>
+                <a:spcPts val="2160"/>
+              </a:lnSpc>
+              <a:spcBef>
+                <a:spcPts val="600"/>
+              </a:spcBef>
+              <a:spcAft>
+                <a:spcPts val="800"/>
+              </a:spcAft>
+              <a:buNone/>
+            </a:pPr>
+            <a:r>
+              <a:rPr lang="en-US" sz="1800" b="1" dirty="0">
+                <a:solidFill>
+                  <a:srgbClr val="997929"/>
+                </a:solidFill>
+                <a:latin typeface="Times New Roman" pitchFamily="34" charset="0"/>
+                <a:ea typeface="Times New Roman" pitchFamily="34" charset="-122"/>
+                <a:cs typeface="Times New Roman" pitchFamily="34" charset="-120"/>
+              </a:rPr>
+              <a:t>Reflection writing (8 min)</a:t>
+            </a:r>
+            <a:endParaRPr lang="en-US" sz="1800" dirty="0"/>
+          </a:p>
+        </p:txBody>
+      </p:sp>
+      <p:sp>
+        <p:nvSpPr>
+          <p:cNvPr id="4" name="Text 2"/>
+          <p:cNvSpPr/>
+          <p:nvPr/>
+        </p:nvSpPr>
+        <p:spPr>
+          <a:xfrm>
+            <a:off x="406301" y="870942"/>
+            <a:ext cx="8498026" cy="426541"/>
+          </a:xfrm>
+          <a:prstGeom prst="rect">
+            <a:avLst/>
+          </a:prstGeom>
+          <a:noFill/>
+          <a:ln/>
+        </p:spPr>
+        <p:txBody>
+          <a:bodyPr wrap="square" lIns="0" tIns="0" rIns="0" bIns="0" rtlCol="0" anchor="t"/>
+          <a:lstStyle/>
+          <a:p>
+            <a:pPr algn="l" indent="0" marL="0">
+              <a:lnSpc>
+                <a:spcPts val="1680"/>
+              </a:lnSpc>
+              <a:spcBef>
+                <a:spcPts val="300"/>
+              </a:spcBef>
+              <a:spcAft>
+                <a:spcPts val="300"/>
+              </a:spcAft>
+              <a:buNone/>
+            </a:pPr>
+            <a:r>
+              <a:rPr lang="en-US" sz="1200" dirty="0">
+                <a:solidFill>
+                  <a:srgbClr val="1A1A1A"/>
+                </a:solidFill>
+                <a:latin typeface="Georgia" pitchFamily="34" charset="0"/>
+                <a:ea typeface="Georgia" pitchFamily="34" charset="-122"/>
+                <a:cs typeface="Georgia" pitchFamily="34" charset="-120"/>
+              </a:rPr>
+              <a:t>5-minute quick-write: </a:t>
+            </a:r>
+            <a:pPr algn="l" indent="0" marL="0">
+              <a:lnSpc>
+                <a:spcPts val="1680"/>
+              </a:lnSpc>
+              <a:spcBef>
+                <a:spcPts val="300"/>
+              </a:spcBef>
+              <a:spcAft>
+                <a:spcPts val="300"/>
+              </a:spcAft>
+              <a:buNone/>
+            </a:pPr>
+            <a:r>
+              <a:rPr lang="en-US" sz="1200" i="1" dirty="0">
+                <a:solidFill>
+                  <a:srgbClr val="1A1A1A"/>
+                </a:solidFill>
+                <a:latin typeface="Georgia" pitchFamily="34" charset="0"/>
+                <a:ea typeface="Georgia" pitchFamily="34" charset="-122"/>
+                <a:cs typeface="Georgia" pitchFamily="34" charset="-120"/>
+              </a:rPr>
+              <a:t>"Does modern postural yoga, with its emphasis on advanced and challenging poses, actually meet Patañjali's criterion of steady AND comfortable? Argue your position in 4–5 sentences."</a:t>
+            </a:r>
+            <a:endParaRPr lang="en-US" sz="1200" dirty="0"/>
+          </a:p>
+        </p:txBody>
+      </p:sp>
+      <p:sp>
+        <p:nvSpPr>
+          <p:cNvPr id="5" name="Text 3"/>
+          <p:cNvSpPr/>
+          <p:nvPr/>
+        </p:nvSpPr>
+        <p:spPr>
+          <a:xfrm>
+            <a:off x="406301" y="4434929"/>
+            <a:ext cx="8498026" cy="213271"/>
+          </a:xfrm>
+          <a:prstGeom prst="rect">
+            <a:avLst/>
+          </a:prstGeom>
+          <a:noFill/>
+          <a:ln/>
+        </p:spPr>
+        <p:txBody>
+          <a:bodyPr wrap="square" lIns="0" tIns="0" rIns="0" bIns="0" rtlCol="0" anchor="t"/>
+          <a:lstStyle/>
+          <a:p>
+            <a:pPr algn="l" indent="0" marL="0">
+              <a:lnSpc>
+                <a:spcPts val="1680"/>
+              </a:lnSpc>
+              <a:spcBef>
+                <a:spcPts val="300"/>
+              </a:spcBef>
+              <a:spcAft>
+                <a:spcPts val="300"/>
+              </a:spcAft>
+              <a:buNone/>
+            </a:pPr>
+            <a:r>
+              <a:rPr lang="en-US" sz="1200" dirty="0">
+                <a:solidFill>
+                  <a:srgbClr val="1A1A1A"/>
+                </a:solidFill>
+                <a:latin typeface="Georgia" pitchFamily="34" charset="0"/>
+                <a:ea typeface="Georgia" pitchFamily="34" charset="-122"/>
+                <a:cs typeface="Georgia" pitchFamily="34" charset="-120"/>
+              </a:rPr>
+              <a:t>Senior ·  · IKS Curriculum</a:t>
+            </a:r>
+            <a:endParaRPr lang="en-US" sz="1200" dirty="0"/>
+          </a:p>
+        </p:txBody>
+      </p:sp>
+    </p:spTree>
+  </p:cSld>
+  <p:clrMapOvr>
+    <a:masterClrMapping/>
+  </p:clrMapOvr>
+</p:sld>
+</file>
+
+<file path=ppt/slides/slide13.xml><?xml version="1.0" encoding="utf-8"?>
+<p:sld xmlns:a="http://schemas.openxmlformats.org/drawingml/2006/main" xmlns:r="http://schemas.openxmlformats.org/officeDocument/2006/relationships" xmlns:p="http://schemas.openxmlformats.org/presentationml/2006/main">
+  <p:cSld name="Slide 13">
+    <p:bg>
+      <p:bgPr>
+        <a:solidFill>
+          <a:srgbClr val="FAF7F2"/>
+        </a:solidFill>
+      </p:bgPr>
+    </p:bg>
+    <p:spTree>
+      <p:nvGrpSpPr>
+        <p:cNvPr id="1" name=""/>
+        <p:cNvGrpSpPr/>
+        <p:nvPr/>
+      </p:nvGrpSpPr>
+      <p:grpSpPr>
+        <a:xfrm>
+          <a:off x="0" y="0"/>
+          <a:ext cx="0" cy="0"/>
+          <a:chOff x="0" y="0"/>
+          <a:chExt cx="0" cy="0"/>
+        </a:xfrm>
+      </p:grpSpPr>
+      <p:sp>
+        <p:nvSpPr>
+          <p:cNvPr id="2" name="Text 0"/>
+          <p:cNvSpPr/>
+          <p:nvPr/>
+        </p:nvSpPr>
+        <p:spPr>
+          <a:xfrm>
+            <a:off x="0" y="0"/>
+            <a:ext cx="9144000" cy="101501"/>
+          </a:xfrm>
+          <a:prstGeom prst="rect">
+            <a:avLst/>
+          </a:prstGeom>
+          <a:solidFill>
+            <a:srgbClr val="5D1D2E"/>
+          </a:solidFill>
+          <a:ln/>
+        </p:spPr>
+        <p:txBody>
+          <a:bodyPr wrap="square" rtlCol="0" anchor="ctr"/>
+          <a:lstStyle/>
+          <a:p>
+            <a:pPr indent="0" marL="0">
+              <a:buNone/>
+            </a:pPr>
+            <a:endParaRPr lang="en-US" dirty="0"/>
+          </a:p>
+        </p:txBody>
+      </p:sp>
+      <p:sp>
+        <p:nvSpPr>
+          <p:cNvPr id="3" name="Text 1"/>
+          <p:cNvSpPr/>
+          <p:nvPr/>
+        </p:nvSpPr>
+        <p:spPr>
+          <a:xfrm>
+            <a:off x="406301" y="457051"/>
+            <a:ext cx="8498026" cy="274290"/>
+          </a:xfrm>
+          <a:prstGeom prst="rect">
+            <a:avLst/>
+          </a:prstGeom>
+          <a:noFill/>
+          <a:ln/>
+        </p:spPr>
+        <p:txBody>
+          <a:bodyPr wrap="square" lIns="0" tIns="0" rIns="0" bIns="0" rtlCol="0" anchor="t"/>
+          <a:lstStyle/>
+          <a:p>
+            <a:pPr algn="l" indent="0" marL="0">
+              <a:lnSpc>
+                <a:spcPts val="2160"/>
+              </a:lnSpc>
+              <a:spcBef>
+                <a:spcPts val="600"/>
+              </a:spcBef>
+              <a:spcAft>
+                <a:spcPts val="800"/>
+              </a:spcAft>
+              <a:buNone/>
+            </a:pPr>
+            <a:r>
+              <a:rPr lang="en-US" sz="1800" b="1" dirty="0">
+                <a:solidFill>
+                  <a:srgbClr val="997929"/>
+                </a:solidFill>
+                <a:latin typeface="Times New Roman" pitchFamily="34" charset="0"/>
+                <a:ea typeface="Times New Roman" pitchFamily="34" charset="-122"/>
+                <a:cs typeface="Times New Roman" pitchFamily="34" charset="-120"/>
+              </a:rPr>
+              <a:t>Wrap-up (4 min)</a:t>
+            </a:r>
+            <a:endParaRPr lang="en-US" sz="1800" dirty="0"/>
+          </a:p>
+        </p:txBody>
+      </p:sp>
+      <p:sp>
+        <p:nvSpPr>
+          <p:cNvPr id="4" name="Text 2"/>
+          <p:cNvSpPr/>
+          <p:nvPr/>
+        </p:nvSpPr>
+        <p:spPr>
+          <a:xfrm>
+            <a:off x="634901" y="883593"/>
+            <a:ext cx="8102798" cy="525661"/>
+          </a:xfrm>
+          <a:prstGeom prst="rect">
+            <a:avLst/>
+          </a:prstGeom>
+          <a:noFill/>
+          <a:ln/>
+        </p:spPr>
+        <p:txBody>
+          <a:bodyPr wrap="square" lIns="0" tIns="0" rIns="0" bIns="0" rtlCol="0" anchor="t"/>
+          <a:lstStyle/>
+          <a:p>
+            <a:pPr algn="l" marL="342900" indent="-342900">
+              <a:lnSpc>
+                <a:spcPts val="1620"/>
+              </a:lnSpc>
+              <a:spcAft>
+                <a:spcPts val="300"/>
+              </a:spcAft>
+              <a:buSzPct val="100000"/>
+              <a:buChar char="•"/>
+            </a:pPr>
+            <a:r>
+              <a:rPr lang="en-US" sz="1200" dirty="0">
+                <a:solidFill>
+                  <a:srgbClr val="1A1A1A"/>
+                </a:solidFill>
+                <a:latin typeface="Georgia" pitchFamily="34" charset="0"/>
+                <a:ea typeface="Georgia" pitchFamily="34" charset="-122"/>
+                <a:cs typeface="Georgia" pitchFamily="34" charset="-120"/>
+              </a:rPr>
+              <a:t>2 students share their position.</a:t>
+            </a:r>
+            <a:endParaRPr lang="en-US" sz="1200" dirty="0"/>
+          </a:p>
+          <a:p>
+            <a:pPr algn="l" marL="342900" indent="-342900">
+              <a:lnSpc>
+                <a:spcPts val="1620"/>
+              </a:lnSpc>
+              <a:spcAft>
+                <a:spcPts val="300"/>
+              </a:spcAft>
+              <a:buSzPct val="100000"/>
+              <a:buChar char="•"/>
+            </a:pPr>
+            <a:r>
+              <a:rPr lang="en-US" sz="1200" dirty="0">
+                <a:solidFill>
+                  <a:srgbClr val="1A1A1A"/>
+                </a:solidFill>
+                <a:latin typeface="Georgia" pitchFamily="34" charset="0"/>
+                <a:ea typeface="Georgia" pitchFamily="34" charset="-122"/>
+                <a:cs typeface="Georgia" pitchFamily="34" charset="-120"/>
+              </a:rPr>
+              <a:t>Preview Day 4: </a:t>
+            </a:r>
+            <a:pPr algn="l" indent="0" marL="0">
+              <a:lnSpc>
+                <a:spcPts val="1620"/>
+              </a:lnSpc>
+              <a:spcAft>
+                <a:spcPts val="300"/>
+              </a:spcAft>
+              <a:buNone/>
+            </a:pPr>
+            <a:r>
+              <a:rPr lang="en-US" sz="1200" i="1" dirty="0">
+                <a:solidFill>
+                  <a:srgbClr val="1A1A1A"/>
+                </a:solidFill>
+                <a:latin typeface="Georgia" pitchFamily="34" charset="0"/>
+                <a:ea typeface="Georgia" pitchFamily="34" charset="-122"/>
+                <a:cs typeface="Georgia" pitchFamily="34" charset="-120"/>
+              </a:rPr>
+              <a:t>"Tomorrow — Sūrya Namaskāra. And a surprising historical question about its age."</a:t>
+            </a:r>
+            <a:endParaRPr lang="en-US" sz="1200" dirty="0"/>
+          </a:p>
+        </p:txBody>
+      </p:sp>
+      <p:sp>
+        <p:nvSpPr>
+          <p:cNvPr id="5" name="Text 3"/>
+          <p:cNvSpPr/>
+          <p:nvPr/>
+        </p:nvSpPr>
+        <p:spPr>
+          <a:xfrm>
+            <a:off x="406301" y="4434929"/>
+            <a:ext cx="8498026" cy="213271"/>
+          </a:xfrm>
+          <a:prstGeom prst="rect">
+            <a:avLst/>
+          </a:prstGeom>
+          <a:noFill/>
+          <a:ln/>
+        </p:spPr>
+        <p:txBody>
+          <a:bodyPr wrap="square" lIns="0" tIns="0" rIns="0" bIns="0" rtlCol="0" anchor="t"/>
+          <a:lstStyle/>
+          <a:p>
+            <a:pPr algn="l" indent="0" marL="0">
+              <a:lnSpc>
+                <a:spcPts val="1680"/>
+              </a:lnSpc>
+              <a:spcBef>
+                <a:spcPts val="300"/>
+              </a:spcBef>
+              <a:spcAft>
+                <a:spcPts val="300"/>
+              </a:spcAft>
+              <a:buNone/>
+            </a:pPr>
+            <a:r>
+              <a:rPr lang="en-US" sz="1200" dirty="0">
+                <a:solidFill>
+                  <a:srgbClr val="1A1A1A"/>
+                </a:solidFill>
+                <a:latin typeface="Georgia" pitchFamily="34" charset="0"/>
+                <a:ea typeface="Georgia" pitchFamily="34" charset="-122"/>
+                <a:cs typeface="Georgia" pitchFamily="34" charset="-120"/>
+              </a:rPr>
+              <a:t>Senior ·  · IKS Curriculum</a:t>
+            </a:r>
+            <a:endParaRPr lang="en-US" sz="1200" dirty="0"/>
+          </a:p>
+        </p:txBody>
+      </p:sp>
+    </p:spTree>
+  </p:cSld>
+  <p:clrMapOvr>
+    <a:masterClrMapping/>
+  </p:clrMapOvr>
+</p:sld>
+</file>
+
+<file path=ppt/slides/slide14.xml><?xml version="1.0" encoding="utf-8"?>
+<p:sld xmlns:a="http://schemas.openxmlformats.org/drawingml/2006/main" xmlns:r="http://schemas.openxmlformats.org/officeDocument/2006/relationships" xmlns:p="http://schemas.openxmlformats.org/presentationml/2006/main">
+  <p:cSld name="Slide 14">
+    <p:bg>
+      <p:bgPr>
+        <a:solidFill>
+          <a:srgbClr val="FAF7F2"/>
+        </a:solidFill>
+      </p:bgPr>
+    </p:bg>
+    <p:spTree>
+      <p:nvGrpSpPr>
+        <p:cNvPr id="1" name=""/>
+        <p:cNvGrpSpPr/>
+        <p:nvPr/>
+      </p:nvGrpSpPr>
+      <p:grpSpPr>
+        <a:xfrm>
+          <a:off x="0" y="0"/>
+          <a:ext cx="0" cy="0"/>
+          <a:chOff x="0" y="0"/>
+          <a:chExt cx="0" cy="0"/>
+        </a:xfrm>
+      </p:grpSpPr>
+      <p:sp>
+        <p:nvSpPr>
+          <p:cNvPr id="2" name="Text 0"/>
+          <p:cNvSpPr/>
+          <p:nvPr/>
+        </p:nvSpPr>
+        <p:spPr>
+          <a:xfrm>
+            <a:off x="0" y="0"/>
+            <a:ext cx="9144000" cy="101501"/>
+          </a:xfrm>
+          <a:prstGeom prst="rect">
+            <a:avLst/>
+          </a:prstGeom>
+          <a:solidFill>
+            <a:srgbClr val="5D1D2E"/>
+          </a:solidFill>
+          <a:ln/>
+        </p:spPr>
+        <p:txBody>
+          <a:bodyPr wrap="square" rtlCol="0" anchor="ctr"/>
+          <a:lstStyle/>
+          <a:p>
+            <a:pPr indent="0" marL="0">
+              <a:buNone/>
+            </a:pPr>
+            <a:endParaRPr lang="en-US" dirty="0"/>
+          </a:p>
+        </p:txBody>
+      </p:sp>
+      <p:sp>
+        <p:nvSpPr>
+          <p:cNvPr id="3" name="Text 1"/>
+          <p:cNvSpPr/>
+          <p:nvPr/>
+        </p:nvSpPr>
+        <p:spPr>
+          <a:xfrm>
+            <a:off x="406301" y="457051"/>
+            <a:ext cx="8498026" cy="274290"/>
+          </a:xfrm>
+          <a:prstGeom prst="rect">
+            <a:avLst/>
+          </a:prstGeom>
+          <a:noFill/>
+          <a:ln/>
+        </p:spPr>
+        <p:txBody>
+          <a:bodyPr wrap="square" lIns="0" tIns="0" rIns="0" bIns="0" rtlCol="0" anchor="t"/>
+          <a:lstStyle/>
+          <a:p>
+            <a:pPr algn="l" indent="0" marL="0">
+              <a:lnSpc>
+                <a:spcPts val="2160"/>
+              </a:lnSpc>
+              <a:spcBef>
+                <a:spcPts val="600"/>
+              </a:spcBef>
+              <a:spcAft>
+                <a:spcPts val="800"/>
+              </a:spcAft>
+              <a:buNone/>
+            </a:pPr>
+            <a:r>
+              <a:rPr lang="en-US" sz="1800" b="1" dirty="0">
+                <a:solidFill>
+                  <a:srgbClr val="997929"/>
+                </a:solidFill>
+                <a:latin typeface="Times New Roman" pitchFamily="34" charset="0"/>
+                <a:ea typeface="Times New Roman" pitchFamily="34" charset="-122"/>
+                <a:cs typeface="Times New Roman" pitchFamily="34" charset="-120"/>
+              </a:rPr>
+              <a:t>Differentiation</a:t>
+            </a:r>
+            <a:endParaRPr lang="en-US" sz="1800" dirty="0"/>
+          </a:p>
+        </p:txBody>
+      </p:sp>
+      <p:sp>
+        <p:nvSpPr>
+          <p:cNvPr id="4" name="Text 2"/>
+          <p:cNvSpPr/>
+          <p:nvPr/>
+        </p:nvSpPr>
+        <p:spPr>
+          <a:xfrm>
+            <a:off x="634901" y="883593"/>
+            <a:ext cx="8102798" cy="525661"/>
+          </a:xfrm>
+          <a:prstGeom prst="rect">
+            <a:avLst/>
+          </a:prstGeom>
+          <a:noFill/>
+          <a:ln/>
+        </p:spPr>
+        <p:txBody>
+          <a:bodyPr wrap="square" lIns="0" tIns="0" rIns="0" bIns="0" rtlCol="0" anchor="t"/>
+          <a:lstStyle/>
+          <a:p>
+            <a:pPr algn="l" marL="342900" indent="-342900">
+              <a:lnSpc>
+                <a:spcPts val="1620"/>
+              </a:lnSpc>
+              <a:spcAft>
+                <a:spcPts val="300"/>
+              </a:spcAft>
+              <a:buSzPct val="100000"/>
+              <a:buChar char="•"/>
+            </a:pPr>
+            <a:r>
+              <a:rPr lang="en-US" sz="1200" b="1" dirty="0">
+                <a:solidFill>
+                  <a:srgbClr val="1A1A1A"/>
+                </a:solidFill>
+                <a:latin typeface="Georgia" pitchFamily="34" charset="0"/>
+                <a:ea typeface="Georgia" pitchFamily="34" charset="-122"/>
+                <a:cs typeface="Georgia" pitchFamily="34" charset="-120"/>
+              </a:rPr>
+              <a:t>Tier up:</a:t>
+            </a:r>
+            <a:pPr algn="l" indent="0" marL="0">
+              <a:lnSpc>
+                <a:spcPts val="1620"/>
+              </a:lnSpc>
+              <a:spcAft>
+                <a:spcPts val="300"/>
+              </a:spcAft>
+              <a:buNone/>
+            </a:pPr>
+            <a:r>
+              <a:rPr lang="en-US" sz="1200" dirty="0">
+                <a:solidFill>
+                  <a:srgbClr val="1A1A1A"/>
+                </a:solidFill>
+                <a:latin typeface="Georgia" pitchFamily="34" charset="0"/>
+                <a:ea typeface="Georgia" pitchFamily="34" charset="-122"/>
+                <a:cs typeface="Georgia" pitchFamily="34" charset="-120"/>
+              </a:rPr>
+              <a:t> Read Bryant's full commentary on YS 2.46–48. Bring 1 question.</a:t>
+            </a:r>
+            <a:endParaRPr lang="en-US" sz="1200" dirty="0"/>
+          </a:p>
+          <a:p>
+            <a:pPr algn="l" marL="342900" indent="-342900">
+              <a:lnSpc>
+                <a:spcPts val="1620"/>
+              </a:lnSpc>
+              <a:spcAft>
+                <a:spcPts val="300"/>
+              </a:spcAft>
+              <a:buSzPct val="100000"/>
+              <a:buChar char="•"/>
+            </a:pPr>
+            <a:r>
+              <a:rPr lang="en-US" sz="1200" b="1" dirty="0">
+                <a:solidFill>
+                  <a:srgbClr val="1A1A1A"/>
+                </a:solidFill>
+                <a:latin typeface="Georgia" pitchFamily="34" charset="0"/>
+                <a:ea typeface="Georgia" pitchFamily="34" charset="-122"/>
+                <a:cs typeface="Georgia" pitchFamily="34" charset="-120"/>
+              </a:rPr>
+              <a:t>Tier down:</a:t>
+            </a:r>
+            <a:pPr algn="l" indent="0" marL="0">
+              <a:lnSpc>
+                <a:spcPts val="1620"/>
+              </a:lnSpc>
+              <a:spcAft>
+                <a:spcPts val="300"/>
+              </a:spcAft>
+              <a:buNone/>
+            </a:pPr>
+            <a:r>
+              <a:rPr lang="en-US" sz="1200" dirty="0">
+                <a:solidFill>
+                  <a:srgbClr val="1A1A1A"/>
+                </a:solidFill>
+                <a:latin typeface="Georgia" pitchFamily="34" charset="0"/>
+                <a:ea typeface="Georgia" pitchFamily="34" charset="-122"/>
+                <a:cs typeface="Georgia" pitchFamily="34" charset="-120"/>
+              </a:rPr>
+              <a:t> Focus on memorising YS 2.46 in Sanskrit (3 words).</a:t>
+            </a:r>
+            <a:endParaRPr lang="en-US" sz="1200" dirty="0"/>
+          </a:p>
+        </p:txBody>
+      </p:sp>
+      <p:sp>
+        <p:nvSpPr>
+          <p:cNvPr id="5" name="Text 3"/>
+          <p:cNvSpPr/>
+          <p:nvPr/>
+        </p:nvSpPr>
+        <p:spPr>
+          <a:xfrm>
+            <a:off x="406301" y="4434929"/>
+            <a:ext cx="8498026" cy="213271"/>
+          </a:xfrm>
+          <a:prstGeom prst="rect">
+            <a:avLst/>
+          </a:prstGeom>
+          <a:noFill/>
+          <a:ln/>
+        </p:spPr>
+        <p:txBody>
+          <a:bodyPr wrap="square" lIns="0" tIns="0" rIns="0" bIns="0" rtlCol="0" anchor="t"/>
+          <a:lstStyle/>
+          <a:p>
+            <a:pPr algn="l" indent="0" marL="0">
+              <a:lnSpc>
+                <a:spcPts val="1680"/>
+              </a:lnSpc>
+              <a:spcBef>
+                <a:spcPts val="300"/>
+              </a:spcBef>
+              <a:spcAft>
+                <a:spcPts val="300"/>
+              </a:spcAft>
+              <a:buNone/>
+            </a:pPr>
+            <a:r>
+              <a:rPr lang="en-US" sz="1200" dirty="0">
+                <a:solidFill>
+                  <a:srgbClr val="1A1A1A"/>
+                </a:solidFill>
+                <a:latin typeface="Georgia" pitchFamily="34" charset="0"/>
+                <a:ea typeface="Georgia" pitchFamily="34" charset="-122"/>
+                <a:cs typeface="Georgia" pitchFamily="34" charset="-120"/>
+              </a:rPr>
+              <a:t>Senior ·  · IKS Curriculum</a:t>
+            </a:r>
+            <a:endParaRPr lang="en-US" sz="1200" dirty="0"/>
+          </a:p>
+        </p:txBody>
+      </p:sp>
+    </p:spTree>
+  </p:cSld>
+  <p:clrMapOvr>
+    <a:masterClrMapping/>
+  </p:clrMapOvr>
+</p:sld>
+</file>
+
+<file path=ppt/slides/slide15.xml><?xml version="1.0" encoding="utf-8"?>
+<p:sld xmlns:a="http://schemas.openxmlformats.org/drawingml/2006/main" xmlns:r="http://schemas.openxmlformats.org/officeDocument/2006/relationships" xmlns:p="http://schemas.openxmlformats.org/presentationml/2006/main">
+  <p:cSld name="Slide 15">
+    <p:bg>
+      <p:bgPr>
+        <a:solidFill>
+          <a:srgbClr val="FAF7F2"/>
+        </a:solidFill>
+      </p:bgPr>
+    </p:bg>
+    <p:spTree>
+      <p:nvGrpSpPr>
+        <p:cNvPr id="1" name=""/>
+        <p:cNvGrpSpPr/>
+        <p:nvPr/>
+      </p:nvGrpSpPr>
+      <p:grpSpPr>
+        <a:xfrm>
+          <a:off x="0" y="0"/>
+          <a:ext cx="0" cy="0"/>
+          <a:chOff x="0" y="0"/>
+          <a:chExt cx="0" cy="0"/>
+        </a:xfrm>
+      </p:grpSpPr>
+      <p:sp>
+        <p:nvSpPr>
+          <p:cNvPr id="2" name="Text 0"/>
+          <p:cNvSpPr/>
+          <p:nvPr/>
+        </p:nvSpPr>
+        <p:spPr>
+          <a:xfrm>
+            <a:off x="0" y="0"/>
+            <a:ext cx="9144000" cy="101501"/>
+          </a:xfrm>
+          <a:prstGeom prst="rect">
+            <a:avLst/>
+          </a:prstGeom>
+          <a:solidFill>
+            <a:srgbClr val="5D1D2E"/>
+          </a:solidFill>
+          <a:ln/>
+        </p:spPr>
+        <p:txBody>
+          <a:bodyPr wrap="square" rtlCol="0" anchor="ctr"/>
+          <a:lstStyle/>
+          <a:p>
+            <a:pPr indent="0" marL="0">
+              <a:buNone/>
+            </a:pPr>
+            <a:endParaRPr lang="en-US" dirty="0"/>
+          </a:p>
+        </p:txBody>
+      </p:sp>
+      <p:sp>
+        <p:nvSpPr>
+          <p:cNvPr id="3" name="Text 1"/>
+          <p:cNvSpPr/>
+          <p:nvPr/>
+        </p:nvSpPr>
+        <p:spPr>
+          <a:xfrm>
+            <a:off x="406301" y="457051"/>
+            <a:ext cx="8498026" cy="274290"/>
+          </a:xfrm>
+          <a:prstGeom prst="rect">
+            <a:avLst/>
+          </a:prstGeom>
+          <a:noFill/>
+          <a:ln/>
+        </p:spPr>
+        <p:txBody>
+          <a:bodyPr wrap="square" lIns="0" tIns="0" rIns="0" bIns="0" rtlCol="0" anchor="t"/>
+          <a:lstStyle/>
+          <a:p>
+            <a:pPr algn="l" indent="0" marL="0">
+              <a:lnSpc>
+                <a:spcPts val="2160"/>
+              </a:lnSpc>
+              <a:spcBef>
+                <a:spcPts val="600"/>
+              </a:spcBef>
+              <a:spcAft>
+                <a:spcPts val="800"/>
+              </a:spcAft>
+              <a:buNone/>
+            </a:pPr>
+            <a:r>
+              <a:rPr lang="en-US" sz="1800" b="1" dirty="0">
+                <a:solidFill>
+                  <a:srgbClr val="997929"/>
+                </a:solidFill>
+                <a:latin typeface="Times New Roman" pitchFamily="34" charset="0"/>
+                <a:ea typeface="Times New Roman" pitchFamily="34" charset="-122"/>
+                <a:cs typeface="Times New Roman" pitchFamily="34" charset="-120"/>
+              </a:rPr>
+              <a:t>Teacher notes</a:t>
+            </a:r>
+            <a:endParaRPr lang="en-US" sz="1800" dirty="0"/>
+          </a:p>
+        </p:txBody>
+      </p:sp>
+      <p:sp>
+        <p:nvSpPr>
+          <p:cNvPr id="4" name="Text 2"/>
+          <p:cNvSpPr/>
+          <p:nvPr/>
+        </p:nvSpPr>
+        <p:spPr>
+          <a:xfrm>
+            <a:off x="634901" y="883593"/>
+            <a:ext cx="8102798" cy="731341"/>
+          </a:xfrm>
+          <a:prstGeom prst="rect">
+            <a:avLst/>
+          </a:prstGeom>
+          <a:noFill/>
+          <a:ln/>
+        </p:spPr>
+        <p:txBody>
+          <a:bodyPr wrap="square" lIns="0" tIns="0" rIns="0" bIns="0" rtlCol="0" anchor="t"/>
+          <a:lstStyle/>
+          <a:p>
+            <a:pPr algn="l" marL="342900" indent="-342900">
+              <a:lnSpc>
+                <a:spcPts val="1620"/>
+              </a:lnSpc>
+              <a:spcAft>
+                <a:spcPts val="300"/>
+              </a:spcAft>
+              <a:buSzPct val="100000"/>
+              <a:buChar char="•"/>
+            </a:pPr>
+            <a:r>
+              <a:rPr lang="en-US" sz="1200" dirty="0">
+                <a:solidFill>
+                  <a:srgbClr val="1A1A1A"/>
+                </a:solidFill>
+                <a:latin typeface="Georgia" pitchFamily="34" charset="0"/>
+                <a:ea typeface="Georgia" pitchFamily="34" charset="-122"/>
+                <a:cs typeface="Georgia" pitchFamily="34" charset="-120"/>
+              </a:rPr>
+              <a:t>The dual criterion is genuinely counter-cultural to most modern yoga. Many studios push the "challenging hold" model. Patañjali doesn't.</a:t>
+            </a:r>
+            <a:endParaRPr lang="en-US" sz="1200" dirty="0"/>
+          </a:p>
+          <a:p>
+            <a:pPr algn="l" marL="342900" indent="-342900">
+              <a:lnSpc>
+                <a:spcPts val="1620"/>
+              </a:lnSpc>
+              <a:spcAft>
+                <a:spcPts val="300"/>
+              </a:spcAft>
+              <a:buSzPct val="100000"/>
+              <a:buChar char="•"/>
+            </a:pPr>
+            <a:r>
+              <a:rPr lang="en-US" sz="1200" dirty="0">
+                <a:solidFill>
+                  <a:srgbClr val="1A1A1A"/>
+                </a:solidFill>
+                <a:latin typeface="Georgia" pitchFamily="34" charset="0"/>
+                <a:ea typeface="Georgia" pitchFamily="34" charset="-122"/>
+                <a:cs typeface="Georgia" pitchFamily="34" charset="-120"/>
+              </a:rPr>
+              <a:t>The reflection writing often surfaces students' own conflicted relationship with effort vs ease.</a:t>
+            </a:r>
+            <a:endParaRPr lang="en-US" sz="1200" dirty="0"/>
+          </a:p>
+        </p:txBody>
+      </p:sp>
+      <p:sp>
+        <p:nvSpPr>
+          <p:cNvPr id="5" name="Text 3"/>
+          <p:cNvSpPr/>
+          <p:nvPr/>
+        </p:nvSpPr>
+        <p:spPr>
+          <a:xfrm>
+            <a:off x="406301" y="4434929"/>
+            <a:ext cx="8498026" cy="213271"/>
+          </a:xfrm>
+          <a:prstGeom prst="rect">
+            <a:avLst/>
+          </a:prstGeom>
+          <a:noFill/>
+          <a:ln/>
+        </p:spPr>
+        <p:txBody>
+          <a:bodyPr wrap="square" lIns="0" tIns="0" rIns="0" bIns="0" rtlCol="0" anchor="t"/>
+          <a:lstStyle/>
+          <a:p>
+            <a:pPr algn="l" indent="0" marL="0">
+              <a:lnSpc>
+                <a:spcPts val="1680"/>
+              </a:lnSpc>
+              <a:spcBef>
+                <a:spcPts val="300"/>
+              </a:spcBef>
+              <a:spcAft>
+                <a:spcPts val="300"/>
+              </a:spcAft>
+              <a:buNone/>
+            </a:pPr>
+            <a:r>
+              <a:rPr lang="en-US" sz="1200" dirty="0">
+                <a:solidFill>
+                  <a:srgbClr val="1A1A1A"/>
+                </a:solidFill>
+                <a:latin typeface="Georgia" pitchFamily="34" charset="0"/>
+                <a:ea typeface="Georgia" pitchFamily="34" charset="-122"/>
+                <a:cs typeface="Georgia" pitchFamily="34" charset="-120"/>
+              </a:rPr>
+              <a:t>Senior ·  · IKS Curriculum</a:t>
+            </a:r>
+            <a:endParaRPr lang="en-US" sz="1200" dirty="0"/>
+          </a:p>
+        </p:txBody>
+      </p:sp>
+    </p:spTree>
+  </p:cSld>
+  <p:clrMapOvr>
+    <a:masterClrMapping/>
+  </p:clrMapOvr>
+</p:sld>
+</file>
+
+<file path=ppt/slides/slide16.xml><?xml version="1.0" encoding="utf-8"?>
+<p:sld xmlns:a="http://schemas.openxmlformats.org/drawingml/2006/main" xmlns:r="http://schemas.openxmlformats.org/officeDocument/2006/relationships" xmlns:p="http://schemas.openxmlformats.org/presentationml/2006/main">
+  <p:cSld name="Slide 16">
+    <p:bg>
+      <p:bgPr>
+        <a:solidFill>
+          <a:srgbClr val="FAF7F2"/>
+        </a:solidFill>
+      </p:bgPr>
+    </p:bg>
+    <p:spTree>
+      <p:nvGrpSpPr>
+        <p:cNvPr id="1" name=""/>
+        <p:cNvGrpSpPr/>
+        <p:nvPr/>
+      </p:nvGrpSpPr>
+      <p:grpSpPr>
+        <a:xfrm>
+          <a:off x="0" y="0"/>
+          <a:ext cx="0" cy="0"/>
+          <a:chOff x="0" y="0"/>
+          <a:chExt cx="0" cy="0"/>
+        </a:xfrm>
+      </p:grpSpPr>
+      <p:sp>
+        <p:nvSpPr>
+          <p:cNvPr id="2" name="Text 0"/>
+          <p:cNvSpPr/>
+          <p:nvPr/>
+        </p:nvSpPr>
+        <p:spPr>
+          <a:xfrm>
+            <a:off x="0" y="0"/>
+            <a:ext cx="9144000" cy="101501"/>
+          </a:xfrm>
+          <a:prstGeom prst="rect">
+            <a:avLst/>
+          </a:prstGeom>
+          <a:solidFill>
+            <a:srgbClr val="5D1D2E"/>
+          </a:solidFill>
+          <a:ln/>
+        </p:spPr>
+        <p:txBody>
+          <a:bodyPr wrap="square" rtlCol="0" anchor="ctr"/>
+          <a:lstStyle/>
+          <a:p>
+            <a:pPr indent="0" marL="0">
+              <a:buNone/>
+            </a:pPr>
+            <a:endParaRPr lang="en-US" dirty="0"/>
+          </a:p>
+        </p:txBody>
+      </p:sp>
+      <p:sp>
+        <p:nvSpPr>
+          <p:cNvPr id="3" name="Text 1"/>
+          <p:cNvSpPr/>
+          <p:nvPr/>
+        </p:nvSpPr>
+        <p:spPr>
+          <a:xfrm>
+            <a:off x="406301" y="457051"/>
+            <a:ext cx="8498026" cy="274290"/>
+          </a:xfrm>
+          <a:prstGeom prst="rect">
+            <a:avLst/>
+          </a:prstGeom>
+          <a:noFill/>
+          <a:ln/>
+        </p:spPr>
+        <p:txBody>
+          <a:bodyPr wrap="square" lIns="0" tIns="0" rIns="0" bIns="0" rtlCol="0" anchor="t"/>
+          <a:lstStyle/>
+          <a:p>
+            <a:pPr algn="l" indent="0" marL="0">
+              <a:lnSpc>
+                <a:spcPts val="2160"/>
+              </a:lnSpc>
+              <a:spcBef>
+                <a:spcPts val="600"/>
+              </a:spcBef>
+              <a:spcAft>
+                <a:spcPts val="800"/>
+              </a:spcAft>
+              <a:buNone/>
+            </a:pPr>
+            <a:r>
+              <a:rPr lang="en-US" sz="1800" b="1" dirty="0">
+                <a:solidFill>
+                  <a:srgbClr val="997929"/>
+                </a:solidFill>
+                <a:latin typeface="Times New Roman" pitchFamily="34" charset="0"/>
+                <a:ea typeface="Times New Roman" pitchFamily="34" charset="-122"/>
+                <a:cs typeface="Times New Roman" pitchFamily="34" charset="-120"/>
+              </a:rPr>
+              <a:t>Citation(s) used</a:t>
+            </a:r>
+            <a:endParaRPr lang="en-US" sz="1800" dirty="0"/>
+          </a:p>
+        </p:txBody>
+      </p:sp>
+      <p:sp>
+        <p:nvSpPr>
+          <p:cNvPr id="4" name="Text 2"/>
+          <p:cNvSpPr/>
+          <p:nvPr/>
+        </p:nvSpPr>
+        <p:spPr>
+          <a:xfrm>
+            <a:off x="634901" y="883593"/>
+            <a:ext cx="8102798" cy="281880"/>
+          </a:xfrm>
+          <a:prstGeom prst="rect">
+            <a:avLst/>
+          </a:prstGeom>
+          <a:noFill/>
+          <a:ln/>
+        </p:spPr>
+        <p:txBody>
+          <a:bodyPr wrap="square" lIns="0" tIns="0" rIns="0" bIns="0" rtlCol="0" anchor="t"/>
+          <a:lstStyle/>
+          <a:p>
+            <a:pPr algn="l" marL="342900" indent="-342900">
+              <a:lnSpc>
+                <a:spcPts val="1620"/>
+              </a:lnSpc>
+              <a:spcAft>
+                <a:spcPts val="300"/>
+              </a:spcAft>
+              <a:buSzPct val="100000"/>
+              <a:buChar char="•"/>
+            </a:pPr>
+            <a:r>
+              <a:rPr lang="en-US" sz="1200" dirty="0">
+                <a:solidFill>
+                  <a:srgbClr val="1A1A1A"/>
+                </a:solidFill>
+                <a:latin typeface="Georgia" pitchFamily="34" charset="0"/>
+                <a:ea typeface="Georgia" pitchFamily="34" charset="-122"/>
+                <a:cs typeface="Georgia" pitchFamily="34" charset="-120"/>
+              </a:rPr>
+              <a:t>Patañjali YS 2.46–48 — Bryant (2009), p. 282–286.</a:t>
             </a:r>
             <a:endParaRPr lang="en-US" sz="1200" dirty="0"/>
           </a:p>
@@ -2617,7 +4413,7 @@
                 <a:ea typeface="Times New Roman" pitchFamily="34" charset="-122"/>
                 <a:cs typeface="Times New Roman" pitchFamily="34" charset="-120"/>
               </a:rPr>
-              <a:t>Materials</a:t>
+              <a:t>Learning objective</a:t>
             </a:r>
             <a:endParaRPr lang="en-US" sz="1800" dirty="0"/>
           </a:p>
@@ -2632,7 +4428,7 @@
         <p:spPr>
           <a:xfrm>
             <a:off x="406301" y="870942"/>
-            <a:ext cx="8498026" cy="213271"/>
+            <a:ext cx="8498026" cy="426541"/>
           </a:xfrm>
           <a:prstGeom prst="rect">
             <a:avLst/>
@@ -2665,7 +4461,7 @@
                 <a:ea typeface="Georgia" pitchFamily="34" charset="-122"/>
                 <a:cs typeface="Georgia" pitchFamily="34" charset="-120"/>
               </a:rPr>
-              <a:t>– Mats – Printed YS 2.46–48 with Bryant's commentary – Practice space</a:t>
+              <a:t>Students read YS 2.46–48 in IAST + translation, identify the dual condition for āsana (steady AND comfortable), and reflect on whether modern āsana practice meets Patañjali's criterion.</a:t>
             </a:r>
             <a:endParaRPr lang="en-US" sz="1200" dirty="0"/>
           </a:p>
@@ -2823,7 +4619,7 @@
                 <a:ea typeface="Times New Roman" pitchFamily="34" charset="-122"/>
                 <a:cs typeface="Times New Roman" pitchFamily="34" charset="-120"/>
               </a:rPr>
-              <a:t>Flow</a:t>
+              <a:t>Materials</a:t>
             </a:r>
             <a:endParaRPr lang="en-US" sz="1800" dirty="0"/>
           </a:p>
@@ -2832,6 +4628,100 @@
       <p:sp>
         <p:nvSpPr>
           <p:cNvPr id="4" name="Text 2"/>
+          <p:cNvSpPr/>
+          <p:nvPr/>
+        </p:nvSpPr>
+        <p:spPr>
+          <a:xfrm>
+            <a:off x="634901" y="883593"/>
+            <a:ext cx="8102798" cy="769441"/>
+          </a:xfrm>
+          <a:prstGeom prst="rect">
+            <a:avLst/>
+          </a:prstGeom>
+          <a:noFill/>
+          <a:ln/>
+        </p:spPr>
+        <p:txBody>
+          <a:bodyPr wrap="square" lIns="0" tIns="0" rIns="0" bIns="0" rtlCol="0" anchor="t"/>
+          <a:lstStyle/>
+          <a:p>
+            <a:pPr algn="l" marL="342900" indent="-342900">
+              <a:lnSpc>
+                <a:spcPts val="1620"/>
+              </a:lnSpc>
+              <a:spcAft>
+                <a:spcPts val="300"/>
+              </a:spcAft>
+              <a:buSzPct val="100000"/>
+              <a:buChar char="•"/>
+            </a:pPr>
+            <a:r>
+              <a:rPr lang="en-US" sz="1200" dirty="0">
+                <a:solidFill>
+                  <a:srgbClr val="1A1A1A"/>
+                </a:solidFill>
+                <a:latin typeface="Georgia" pitchFamily="34" charset="0"/>
+                <a:ea typeface="Georgia" pitchFamily="34" charset="-122"/>
+                <a:cs typeface="Georgia" pitchFamily="34" charset="-120"/>
+              </a:rPr>
+              <a:t>Mats</a:t>
+            </a:r>
+            <a:endParaRPr lang="en-US" sz="1200" dirty="0"/>
+          </a:p>
+          <a:p>
+            <a:pPr algn="l" marL="342900" indent="-342900">
+              <a:lnSpc>
+                <a:spcPts val="1620"/>
+              </a:lnSpc>
+              <a:spcAft>
+                <a:spcPts val="300"/>
+              </a:spcAft>
+              <a:buSzPct val="100000"/>
+              <a:buChar char="•"/>
+            </a:pPr>
+            <a:r>
+              <a:rPr lang="en-US" sz="1200" dirty="0">
+                <a:solidFill>
+                  <a:srgbClr val="1A1A1A"/>
+                </a:solidFill>
+                <a:latin typeface="Georgia" pitchFamily="34" charset="0"/>
+                <a:ea typeface="Georgia" pitchFamily="34" charset="-122"/>
+                <a:cs typeface="Georgia" pitchFamily="34" charset="-120"/>
+              </a:rPr>
+              <a:t>Printed YS 2.46–48 with Bryant's commentary</a:t>
+            </a:r>
+            <a:endParaRPr lang="en-US" sz="1200" dirty="0"/>
+          </a:p>
+          <a:p>
+            <a:pPr algn="l" marL="342900" indent="-342900">
+              <a:lnSpc>
+                <a:spcPts val="1620"/>
+              </a:lnSpc>
+              <a:spcAft>
+                <a:spcPts val="300"/>
+              </a:spcAft>
+              <a:buSzPct val="100000"/>
+              <a:buChar char="•"/>
+            </a:pPr>
+            <a:r>
+              <a:rPr lang="en-US" sz="1200" dirty="0">
+                <a:solidFill>
+                  <a:srgbClr val="1A1A1A"/>
+                </a:solidFill>
+                <a:latin typeface="Georgia" pitchFamily="34" charset="0"/>
+                <a:ea typeface="Georgia" pitchFamily="34" charset="-122"/>
+                <a:cs typeface="Georgia" pitchFamily="34" charset="-120"/>
+              </a:rPr>
+              <a:t>Practice space</a:t>
+            </a:r>
+            <a:endParaRPr lang="en-US" sz="1200" dirty="0"/>
+          </a:p>
+        </p:txBody>
+      </p:sp>
+      <p:sp>
+        <p:nvSpPr>
+          <p:cNvPr id="5" name="Text 3"/>
           <p:cNvSpPr/>
           <p:nvPr/>
         </p:nvSpPr>
@@ -2981,7 +4871,7 @@
                 <a:ea typeface="Times New Roman" pitchFamily="34" charset="-122"/>
                 <a:cs typeface="Times New Roman" pitchFamily="34" charset="-120"/>
               </a:rPr>
-              <a:t>Settle (3 min)</a:t>
+              <a:t>Flow</a:t>
             </a:r>
             <a:endParaRPr lang="en-US" sz="1800" dirty="0"/>
           </a:p>
@@ -3139,7 +5029,7 @@
                 <a:ea typeface="Times New Roman" pitchFamily="34" charset="-122"/>
                 <a:cs typeface="Times New Roman" pitchFamily="34" charset="-120"/>
               </a:rPr>
-              <a:t>Reading (15 min)</a:t>
+              <a:t>Settle (3 min)</a:t>
             </a:r>
             <a:endParaRPr lang="en-US" sz="1800" dirty="0"/>
           </a:p>
@@ -3153,849 +5043,7 @@
         </p:nvSpPr>
         <p:spPr>
           <a:xfrm>
-            <a:off x="634901" y="883593"/>
-            <a:ext cx="8102798" cy="281880"/>
-          </a:xfrm>
-          <a:prstGeom prst="rect">
-            <a:avLst/>
-          </a:prstGeom>
-          <a:noFill/>
-          <a:ln/>
-        </p:spPr>
-        <p:txBody>
-          <a:bodyPr wrap="square" lIns="0" tIns="0" rIns="0" bIns="0" rtlCol="0" anchor="t"/>
-          <a:lstStyle/>
-          <a:p>
-            <a:pPr algn="l" marL="342900" indent="-342900">
-              <a:lnSpc>
-                <a:spcPts val="1620"/>
-              </a:lnSpc>
-              <a:spcAft>
-                <a:spcPts val="300"/>
-              </a:spcAft>
-              <a:buSzPct val="100000"/>
-              <a:buChar char="•"/>
-            </a:pPr>
-            <a:r>
-              <a:rPr lang="en-US" sz="1200" b="1" dirty="0">
-                <a:solidFill>
-                  <a:srgbClr val="1A1A1A"/>
-                </a:solidFill>
-                <a:latin typeface="Georgia" pitchFamily="34" charset="0"/>
-                <a:ea typeface="Georgia" pitchFamily="34" charset="-122"/>
-                <a:cs typeface="Georgia" pitchFamily="34" charset="-120"/>
-              </a:rPr>
-              <a:t>YS 2.46:</a:t>
-            </a:r>
-            <a:endParaRPr lang="en-US" sz="1200" dirty="0"/>
-          </a:p>
-        </p:txBody>
-      </p:sp>
-      <p:sp>
-        <p:nvSpPr>
-          <p:cNvPr id="5" name="Text 3"/>
-          <p:cNvSpPr/>
-          <p:nvPr/>
-        </p:nvSpPr>
-        <p:spPr>
-          <a:xfrm>
-            <a:off x="406301" y="1254323"/>
-            <a:ext cx="8498026" cy="213271"/>
-          </a:xfrm>
-          <a:prstGeom prst="rect">
-            <a:avLst/>
-          </a:prstGeom>
-          <a:noFill/>
-          <a:ln/>
-        </p:spPr>
-        <p:txBody>
-          <a:bodyPr wrap="square" lIns="0" tIns="0" rIns="0" bIns="0" rtlCol="0" anchor="t"/>
-          <a:lstStyle/>
-          <a:p>
-            <a:pPr algn="l" indent="0" marL="0">
-              <a:lnSpc>
-                <a:spcPts val="1680"/>
-              </a:lnSpc>
-              <a:spcBef>
-                <a:spcPts val="300"/>
-              </a:spcBef>
-              <a:spcAft>
-                <a:spcPts val="300"/>
-              </a:spcAft>
-              <a:buNone/>
-            </a:pPr>
-            <a:r>
-              <a:rPr lang="en-US" sz="1200" dirty="0">
-                <a:solidFill>
-                  <a:srgbClr val="1A1A1A"/>
-                </a:solidFill>
-                <a:latin typeface="Georgia" pitchFamily="34" charset="0"/>
-                <a:ea typeface="Georgia" pitchFamily="34" charset="-122"/>
-                <a:cs typeface="Georgia" pitchFamily="34" charset="-120"/>
-              </a:rPr>
-              <a:t>&gt; </a:t>
-            </a:r>
-            <a:pPr algn="l" indent="0" marL="0">
-              <a:lnSpc>
-                <a:spcPts val="1680"/>
-              </a:lnSpc>
-              <a:spcBef>
-                <a:spcPts val="300"/>
-              </a:spcBef>
-              <a:spcAft>
-                <a:spcPts val="300"/>
-              </a:spcAft>
-              <a:buNone/>
-            </a:pPr>
-            <a:r>
-              <a:rPr lang="en-US" sz="1200" i="1" dirty="0">
-                <a:solidFill>
-                  <a:srgbClr val="1A1A1A"/>
-                </a:solidFill>
-                <a:latin typeface="Georgia" pitchFamily="34" charset="0"/>
-                <a:ea typeface="Georgia" pitchFamily="34" charset="-122"/>
-                <a:cs typeface="Georgia" pitchFamily="34" charset="-120"/>
-              </a:rPr>
-              <a:t>sthira-sukham āsanam</a:t>
-            </a:r>
-            <a:pPr algn="l" indent="0" marL="0">
-              <a:lnSpc>
-                <a:spcPts val="1680"/>
-              </a:lnSpc>
-              <a:spcBef>
-                <a:spcPts val="300"/>
-              </a:spcBef>
-              <a:spcAft>
-                <a:spcPts val="300"/>
-              </a:spcAft>
-              <a:buNone/>
-            </a:pPr>
-            <a:r>
-              <a:rPr lang="en-US" sz="1200" dirty="0">
-                <a:solidFill>
-                  <a:srgbClr val="1A1A1A"/>
-                </a:solidFill>
-                <a:latin typeface="Georgia" pitchFamily="34" charset="0"/>
-                <a:ea typeface="Georgia" pitchFamily="34" charset="-122"/>
-                <a:cs typeface="Georgia" pitchFamily="34" charset="-120"/>
-              </a:rPr>
-              <a:t> &gt; "Posture should be steady and comfortable."</a:t>
-            </a:r>
-            <a:endParaRPr lang="en-US" sz="1200" dirty="0"/>
-          </a:p>
-        </p:txBody>
-      </p:sp>
-      <p:sp>
-        <p:nvSpPr>
-          <p:cNvPr id="6" name="Text 4"/>
-          <p:cNvSpPr/>
-          <p:nvPr/>
-        </p:nvSpPr>
-        <p:spPr>
-          <a:xfrm>
-            <a:off x="406301" y="1543794"/>
-            <a:ext cx="8498026" cy="213271"/>
-          </a:xfrm>
-          <a:prstGeom prst="rect">
-            <a:avLst/>
-          </a:prstGeom>
-          <a:noFill/>
-          <a:ln/>
-        </p:spPr>
-        <p:txBody>
-          <a:bodyPr wrap="square" lIns="0" tIns="0" rIns="0" bIns="0" rtlCol="0" anchor="t"/>
-          <a:lstStyle/>
-          <a:p>
-            <a:pPr algn="l" indent="0" marL="0">
-              <a:lnSpc>
-                <a:spcPts val="1680"/>
-              </a:lnSpc>
-              <a:spcBef>
-                <a:spcPts val="300"/>
-              </a:spcBef>
-              <a:spcAft>
-                <a:spcPts val="300"/>
-              </a:spcAft>
-              <a:buNone/>
-            </a:pPr>
-            <a:r>
-              <a:rPr lang="en-US" sz="1200" dirty="0">
-                <a:solidFill>
-                  <a:srgbClr val="1A1A1A"/>
-                </a:solidFill>
-                <a:latin typeface="Georgia" pitchFamily="34" charset="0"/>
-                <a:ea typeface="Georgia" pitchFamily="34" charset="-122"/>
-                <a:cs typeface="Georgia" pitchFamily="34" charset="-120"/>
-              </a:rPr>
-              <a:t>– 3 words. 3 Sanskrit words. </a:t>
-            </a:r>
-            <a:pPr algn="l" indent="0" marL="0">
-              <a:lnSpc>
-                <a:spcPts val="1680"/>
-              </a:lnSpc>
-              <a:spcBef>
-                <a:spcPts val="300"/>
-              </a:spcBef>
-              <a:spcAft>
-                <a:spcPts val="300"/>
-              </a:spcAft>
-              <a:buNone/>
-            </a:pPr>
-            <a:r>
-              <a:rPr lang="en-US" sz="1200" i="1" dirty="0">
-                <a:solidFill>
-                  <a:srgbClr val="1A1A1A"/>
-                </a:solidFill>
-                <a:latin typeface="Georgia" pitchFamily="34" charset="0"/>
-                <a:ea typeface="Georgia" pitchFamily="34" charset="-122"/>
-                <a:cs typeface="Georgia" pitchFamily="34" charset="-120"/>
-              </a:rPr>
-              <a:t>sthira</a:t>
-            </a:r>
-            <a:pPr algn="l" indent="0" marL="0">
-              <a:lnSpc>
-                <a:spcPts val="1680"/>
-              </a:lnSpc>
-              <a:spcBef>
-                <a:spcPts val="300"/>
-              </a:spcBef>
-              <a:spcAft>
-                <a:spcPts val="300"/>
-              </a:spcAft>
-              <a:buNone/>
-            </a:pPr>
-            <a:r>
-              <a:rPr lang="en-US" sz="1200" dirty="0">
-                <a:solidFill>
-                  <a:srgbClr val="1A1A1A"/>
-                </a:solidFill>
-                <a:latin typeface="Georgia" pitchFamily="34" charset="0"/>
-                <a:ea typeface="Georgia" pitchFamily="34" charset="-122"/>
-                <a:cs typeface="Georgia" pitchFamily="34" charset="-120"/>
-              </a:rPr>
-              <a:t> = steady, firm. </a:t>
-            </a:r>
-            <a:pPr algn="l" indent="0" marL="0">
-              <a:lnSpc>
-                <a:spcPts val="1680"/>
-              </a:lnSpc>
-              <a:spcBef>
-                <a:spcPts val="300"/>
-              </a:spcBef>
-              <a:spcAft>
-                <a:spcPts val="300"/>
-              </a:spcAft>
-              <a:buNone/>
-            </a:pPr>
-            <a:r>
-              <a:rPr lang="en-US" sz="1200" i="1" dirty="0">
-                <a:solidFill>
-                  <a:srgbClr val="1A1A1A"/>
-                </a:solidFill>
-                <a:latin typeface="Georgia" pitchFamily="34" charset="0"/>
-                <a:ea typeface="Georgia" pitchFamily="34" charset="-122"/>
-                <a:cs typeface="Georgia" pitchFamily="34" charset="-120"/>
-              </a:rPr>
-              <a:t>sukha</a:t>
-            </a:r>
-            <a:pPr algn="l" indent="0" marL="0">
-              <a:lnSpc>
-                <a:spcPts val="1680"/>
-              </a:lnSpc>
-              <a:spcBef>
-                <a:spcPts val="300"/>
-              </a:spcBef>
-              <a:spcAft>
-                <a:spcPts val="300"/>
-              </a:spcAft>
-              <a:buNone/>
-            </a:pPr>
-            <a:r>
-              <a:rPr lang="en-US" sz="1200" dirty="0">
-                <a:solidFill>
-                  <a:srgbClr val="1A1A1A"/>
-                </a:solidFill>
-                <a:latin typeface="Georgia" pitchFamily="34" charset="0"/>
-                <a:ea typeface="Georgia" pitchFamily="34" charset="-122"/>
-                <a:cs typeface="Georgia" pitchFamily="34" charset="-120"/>
-              </a:rPr>
-              <a:t> = comfortable, easeful. </a:t>
-            </a:r>
-            <a:pPr algn="l" indent="0" marL="0">
-              <a:lnSpc>
-                <a:spcPts val="1680"/>
-              </a:lnSpc>
-              <a:spcBef>
-                <a:spcPts val="300"/>
-              </a:spcBef>
-              <a:spcAft>
-                <a:spcPts val="300"/>
-              </a:spcAft>
-              <a:buNone/>
-            </a:pPr>
-            <a:r>
-              <a:rPr lang="en-US" sz="1200" i="1" dirty="0">
-                <a:solidFill>
-                  <a:srgbClr val="1A1A1A"/>
-                </a:solidFill>
-                <a:latin typeface="Georgia" pitchFamily="34" charset="0"/>
-                <a:ea typeface="Georgia" pitchFamily="34" charset="-122"/>
-                <a:cs typeface="Georgia" pitchFamily="34" charset="-120"/>
-              </a:rPr>
-              <a:t>āsanam</a:t>
-            </a:r>
-            <a:pPr algn="l" indent="0" marL="0">
-              <a:lnSpc>
-                <a:spcPts val="1680"/>
-              </a:lnSpc>
-              <a:spcBef>
-                <a:spcPts val="300"/>
-              </a:spcBef>
-              <a:spcAft>
-                <a:spcPts val="300"/>
-              </a:spcAft>
-              <a:buNone/>
-            </a:pPr>
-            <a:r>
-              <a:rPr lang="en-US" sz="1200" dirty="0">
-                <a:solidFill>
-                  <a:srgbClr val="1A1A1A"/>
-                </a:solidFill>
-                <a:latin typeface="Georgia" pitchFamily="34" charset="0"/>
-                <a:ea typeface="Georgia" pitchFamily="34" charset="-122"/>
-                <a:cs typeface="Georgia" pitchFamily="34" charset="-120"/>
-              </a:rPr>
-              <a:t> = posture.</a:t>
-            </a:r>
-            <a:endParaRPr lang="en-US" sz="1200" dirty="0"/>
-          </a:p>
-        </p:txBody>
-      </p:sp>
-      <p:sp>
-        <p:nvSpPr>
-          <p:cNvPr id="7" name="Text 5"/>
-          <p:cNvSpPr/>
-          <p:nvPr/>
-        </p:nvSpPr>
-        <p:spPr>
-          <a:xfrm>
-            <a:off x="406301" y="1833265"/>
-            <a:ext cx="8498026" cy="213271"/>
-          </a:xfrm>
-          <a:prstGeom prst="rect">
-            <a:avLst/>
-          </a:prstGeom>
-          <a:noFill/>
-          <a:ln/>
-        </p:spPr>
-        <p:txBody>
-          <a:bodyPr wrap="square" lIns="0" tIns="0" rIns="0" bIns="0" rtlCol="0" anchor="t"/>
-          <a:lstStyle/>
-          <a:p>
-            <a:pPr algn="l" indent="0" marL="0">
-              <a:lnSpc>
-                <a:spcPts val="1680"/>
-              </a:lnSpc>
-              <a:spcBef>
-                <a:spcPts val="300"/>
-              </a:spcBef>
-              <a:spcAft>
-                <a:spcPts val="300"/>
-              </a:spcAft>
-              <a:buNone/>
-            </a:pPr>
-            <a:r>
-              <a:rPr lang="en-US" sz="1200" dirty="0">
-                <a:solidFill>
-                  <a:srgbClr val="1A1A1A"/>
-                </a:solidFill>
-                <a:latin typeface="Georgia" pitchFamily="34" charset="0"/>
-                <a:ea typeface="Georgia" pitchFamily="34" charset="-122"/>
-                <a:cs typeface="Georgia" pitchFamily="34" charset="-120"/>
-              </a:rPr>
-              <a:t>– The dual condition: BOTH steady AND comfortable. Not steady-but-uncomfortable. Not comfortable-but-collapsing.</a:t>
-            </a:r>
-            <a:endParaRPr lang="en-US" sz="1200" dirty="0"/>
-          </a:p>
-        </p:txBody>
-      </p:sp>
-      <p:sp>
-        <p:nvSpPr>
-          <p:cNvPr id="8" name="Text 6"/>
-          <p:cNvSpPr/>
-          <p:nvPr/>
-        </p:nvSpPr>
-        <p:spPr>
-          <a:xfrm>
-            <a:off x="634901" y="2135386"/>
-            <a:ext cx="8102798" cy="281880"/>
-          </a:xfrm>
-          <a:prstGeom prst="rect">
-            <a:avLst/>
-          </a:prstGeom>
-          <a:noFill/>
-          <a:ln/>
-        </p:spPr>
-        <p:txBody>
-          <a:bodyPr wrap="square" lIns="0" tIns="0" rIns="0" bIns="0" rtlCol="0" anchor="t"/>
-          <a:lstStyle/>
-          <a:p>
-            <a:pPr algn="l" marL="342900" indent="-342900">
-              <a:lnSpc>
-                <a:spcPts val="1620"/>
-              </a:lnSpc>
-              <a:spcAft>
-                <a:spcPts val="300"/>
-              </a:spcAft>
-              <a:buSzPct val="100000"/>
-              <a:buChar char="•"/>
-            </a:pPr>
-            <a:r>
-              <a:rPr lang="en-US" sz="1200" b="1" dirty="0">
-                <a:solidFill>
-                  <a:srgbClr val="1A1A1A"/>
-                </a:solidFill>
-                <a:latin typeface="Georgia" pitchFamily="34" charset="0"/>
-                <a:ea typeface="Georgia" pitchFamily="34" charset="-122"/>
-                <a:cs typeface="Georgia" pitchFamily="34" charset="-120"/>
-              </a:rPr>
-              <a:t>YS 2.47:</a:t>
-            </a:r>
-            <a:endParaRPr lang="en-US" sz="1200" dirty="0"/>
-          </a:p>
-        </p:txBody>
-      </p:sp>
-      <p:sp>
-        <p:nvSpPr>
-          <p:cNvPr id="9" name="Text 7"/>
-          <p:cNvSpPr/>
-          <p:nvPr/>
-        </p:nvSpPr>
-        <p:spPr>
-          <a:xfrm>
-            <a:off x="406301" y="2506117"/>
-            <a:ext cx="8498026" cy="426541"/>
-          </a:xfrm>
-          <a:prstGeom prst="rect">
-            <a:avLst/>
-          </a:prstGeom>
-          <a:noFill/>
-          <a:ln/>
-        </p:spPr>
-        <p:txBody>
-          <a:bodyPr wrap="square" lIns="0" tIns="0" rIns="0" bIns="0" rtlCol="0" anchor="t"/>
-          <a:lstStyle/>
-          <a:p>
-            <a:pPr algn="l" indent="0" marL="0">
-              <a:lnSpc>
-                <a:spcPts val="1680"/>
-              </a:lnSpc>
-              <a:spcBef>
-                <a:spcPts val="300"/>
-              </a:spcBef>
-              <a:spcAft>
-                <a:spcPts val="300"/>
-              </a:spcAft>
-              <a:buNone/>
-            </a:pPr>
-            <a:r>
-              <a:rPr lang="en-US" sz="1200" dirty="0">
-                <a:solidFill>
-                  <a:srgbClr val="1A1A1A"/>
-                </a:solidFill>
-                <a:latin typeface="Georgia" pitchFamily="34" charset="0"/>
-                <a:ea typeface="Georgia" pitchFamily="34" charset="-122"/>
-                <a:cs typeface="Georgia" pitchFamily="34" charset="-120"/>
-              </a:rPr>
-              <a:t>&gt; </a:t>
-            </a:r>
-            <a:pPr algn="l" indent="0" marL="0">
-              <a:lnSpc>
-                <a:spcPts val="1680"/>
-              </a:lnSpc>
-              <a:spcBef>
-                <a:spcPts val="300"/>
-              </a:spcBef>
-              <a:spcAft>
-                <a:spcPts val="300"/>
-              </a:spcAft>
-              <a:buNone/>
-            </a:pPr>
-            <a:r>
-              <a:rPr lang="en-US" sz="1200" i="1" dirty="0">
-                <a:solidFill>
-                  <a:srgbClr val="1A1A1A"/>
-                </a:solidFill>
-                <a:latin typeface="Georgia" pitchFamily="34" charset="0"/>
-                <a:ea typeface="Georgia" pitchFamily="34" charset="-122"/>
-                <a:cs typeface="Georgia" pitchFamily="34" charset="-120"/>
-              </a:rPr>
-              <a:t>prayatna-śaithilyānanta-samāpattibhyām</a:t>
-            </a:r>
-            <a:pPr algn="l" indent="0" marL="0">
-              <a:lnSpc>
-                <a:spcPts val="1680"/>
-              </a:lnSpc>
-              <a:spcBef>
-                <a:spcPts val="300"/>
-              </a:spcBef>
-              <a:spcAft>
-                <a:spcPts val="300"/>
-              </a:spcAft>
-              <a:buNone/>
-            </a:pPr>
-            <a:r>
-              <a:rPr lang="en-US" sz="1200" dirty="0">
-                <a:solidFill>
-                  <a:srgbClr val="1A1A1A"/>
-                </a:solidFill>
-                <a:latin typeface="Georgia" pitchFamily="34" charset="0"/>
-                <a:ea typeface="Georgia" pitchFamily="34" charset="-122"/>
-                <a:cs typeface="Georgia" pitchFamily="34" charset="-120"/>
-              </a:rPr>
-              <a:t> &gt; "[Sthira-sukham is achieved] through the relaxation of effort and absorption into the infinite."</a:t>
-            </a:r>
-            <a:endParaRPr lang="en-US" sz="1200" dirty="0"/>
-          </a:p>
-        </p:txBody>
-      </p:sp>
-      <p:sp>
-        <p:nvSpPr>
-          <p:cNvPr id="10" name="Text 8"/>
-          <p:cNvSpPr/>
-          <p:nvPr/>
-        </p:nvSpPr>
-        <p:spPr>
-          <a:xfrm>
-            <a:off x="406301" y="3008858"/>
-            <a:ext cx="8498026" cy="426541"/>
-          </a:xfrm>
-          <a:prstGeom prst="rect">
-            <a:avLst/>
-          </a:prstGeom>
-          <a:noFill/>
-          <a:ln/>
-        </p:spPr>
-        <p:txBody>
-          <a:bodyPr wrap="square" lIns="0" tIns="0" rIns="0" bIns="0" rtlCol="0" anchor="t"/>
-          <a:lstStyle/>
-          <a:p>
-            <a:pPr algn="l" indent="0" marL="0">
-              <a:lnSpc>
-                <a:spcPts val="1680"/>
-              </a:lnSpc>
-              <a:spcBef>
-                <a:spcPts val="300"/>
-              </a:spcBef>
-              <a:spcAft>
-                <a:spcPts val="300"/>
-              </a:spcAft>
-              <a:buNone/>
-            </a:pPr>
-            <a:r>
-              <a:rPr lang="en-US" sz="1200" dirty="0">
-                <a:solidFill>
-                  <a:srgbClr val="1A1A1A"/>
-                </a:solidFill>
-                <a:latin typeface="Georgia" pitchFamily="34" charset="0"/>
-                <a:ea typeface="Georgia" pitchFamily="34" charset="-122"/>
-                <a:cs typeface="Georgia" pitchFamily="34" charset="-120"/>
-              </a:rPr>
-              <a:t>– Two means to the dual condition: </a:t>
-            </a:r>
-            <a:pPr algn="l" indent="0" marL="0">
-              <a:lnSpc>
-                <a:spcPts val="1680"/>
-              </a:lnSpc>
-              <a:spcBef>
-                <a:spcPts val="300"/>
-              </a:spcBef>
-              <a:spcAft>
-                <a:spcPts val="300"/>
-              </a:spcAft>
-              <a:buNone/>
-            </a:pPr>
-            <a:r>
-              <a:rPr lang="en-US" sz="1200" i="1" dirty="0">
-                <a:solidFill>
-                  <a:srgbClr val="1A1A1A"/>
-                </a:solidFill>
-                <a:latin typeface="Georgia" pitchFamily="34" charset="0"/>
-                <a:ea typeface="Georgia" pitchFamily="34" charset="-122"/>
-                <a:cs typeface="Georgia" pitchFamily="34" charset="-120"/>
-              </a:rPr>
-              <a:t>prayatna-śaithilya</a:t>
-            </a:r>
-            <a:pPr algn="l" indent="0" marL="0">
-              <a:lnSpc>
-                <a:spcPts val="1680"/>
-              </a:lnSpc>
-              <a:spcBef>
-                <a:spcPts val="300"/>
-              </a:spcBef>
-              <a:spcAft>
-                <a:spcPts val="300"/>
-              </a:spcAft>
-              <a:buNone/>
-            </a:pPr>
-            <a:r>
-              <a:rPr lang="en-US" sz="1200" dirty="0">
-                <a:solidFill>
-                  <a:srgbClr val="1A1A1A"/>
-                </a:solidFill>
-                <a:latin typeface="Georgia" pitchFamily="34" charset="0"/>
-                <a:ea typeface="Georgia" pitchFamily="34" charset="-122"/>
-                <a:cs typeface="Georgia" pitchFamily="34" charset="-120"/>
-              </a:rPr>
-              <a:t> (relaxing effort) and </a:t>
-            </a:r>
-            <a:pPr algn="l" indent="0" marL="0">
-              <a:lnSpc>
-                <a:spcPts val="1680"/>
-              </a:lnSpc>
-              <a:spcBef>
-                <a:spcPts val="300"/>
-              </a:spcBef>
-              <a:spcAft>
-                <a:spcPts val="300"/>
-              </a:spcAft>
-              <a:buNone/>
-            </a:pPr>
-            <a:r>
-              <a:rPr lang="en-US" sz="1200" i="1" dirty="0">
-                <a:solidFill>
-                  <a:srgbClr val="1A1A1A"/>
-                </a:solidFill>
-                <a:latin typeface="Georgia" pitchFamily="34" charset="0"/>
-                <a:ea typeface="Georgia" pitchFamily="34" charset="-122"/>
-                <a:cs typeface="Georgia" pitchFamily="34" charset="-120"/>
-              </a:rPr>
-              <a:t>ananta-samāpatti</a:t>
-            </a:r>
-            <a:pPr algn="l" indent="0" marL="0">
-              <a:lnSpc>
-                <a:spcPts val="1680"/>
-              </a:lnSpc>
-              <a:spcBef>
-                <a:spcPts val="300"/>
-              </a:spcBef>
-              <a:spcAft>
-                <a:spcPts val="300"/>
-              </a:spcAft>
-              <a:buNone/>
-            </a:pPr>
-            <a:r>
-              <a:rPr lang="en-US" sz="1200" dirty="0">
-                <a:solidFill>
-                  <a:srgbClr val="1A1A1A"/>
-                </a:solidFill>
-                <a:latin typeface="Georgia" pitchFamily="34" charset="0"/>
-                <a:ea typeface="Georgia" pitchFamily="34" charset="-122"/>
-                <a:cs typeface="Georgia" pitchFamily="34" charset="-120"/>
-              </a:rPr>
-              <a:t> (absorption into the infinite / the limitless).</a:t>
-            </a:r>
-            <a:endParaRPr lang="en-US" sz="1200" dirty="0"/>
-          </a:p>
-        </p:txBody>
-      </p:sp>
-      <p:sp>
-        <p:nvSpPr>
-          <p:cNvPr id="11" name="Text 9"/>
-          <p:cNvSpPr/>
-          <p:nvPr/>
-        </p:nvSpPr>
-        <p:spPr>
-          <a:xfrm>
-            <a:off x="634901" y="3524250"/>
-            <a:ext cx="8102798" cy="281880"/>
-          </a:xfrm>
-          <a:prstGeom prst="rect">
-            <a:avLst/>
-          </a:prstGeom>
-          <a:noFill/>
-          <a:ln/>
-        </p:spPr>
-        <p:txBody>
-          <a:bodyPr wrap="square" lIns="0" tIns="0" rIns="0" bIns="0" rtlCol="0" anchor="t"/>
-          <a:lstStyle/>
-          <a:p>
-            <a:pPr algn="l" marL="342900" indent="-342900">
-              <a:lnSpc>
-                <a:spcPts val="1620"/>
-              </a:lnSpc>
-              <a:spcAft>
-                <a:spcPts val="300"/>
-              </a:spcAft>
-              <a:buSzPct val="100000"/>
-              <a:buChar char="•"/>
-            </a:pPr>
-            <a:r>
-              <a:rPr lang="en-US" sz="1200" b="1" dirty="0">
-                <a:solidFill>
-                  <a:srgbClr val="1A1A1A"/>
-                </a:solidFill>
-                <a:latin typeface="Georgia" pitchFamily="34" charset="0"/>
-                <a:ea typeface="Georgia" pitchFamily="34" charset="-122"/>
-                <a:cs typeface="Georgia" pitchFamily="34" charset="-120"/>
-              </a:rPr>
-              <a:t>YS 2.48:</a:t>
-            </a:r>
-            <a:endParaRPr lang="en-US" sz="1200" dirty="0"/>
-          </a:p>
-        </p:txBody>
-      </p:sp>
-      <p:sp>
-        <p:nvSpPr>
-          <p:cNvPr id="12" name="Text 10"/>
-          <p:cNvSpPr/>
-          <p:nvPr/>
-        </p:nvSpPr>
-        <p:spPr>
-          <a:xfrm>
-            <a:off x="406301" y="3894981"/>
-            <a:ext cx="8498026" cy="213271"/>
-          </a:xfrm>
-          <a:prstGeom prst="rect">
-            <a:avLst/>
-          </a:prstGeom>
-          <a:noFill/>
-          <a:ln/>
-        </p:spPr>
-        <p:txBody>
-          <a:bodyPr wrap="square" lIns="0" tIns="0" rIns="0" bIns="0" rtlCol="0" anchor="t"/>
-          <a:lstStyle/>
-          <a:p>
-            <a:pPr algn="l" indent="0" marL="0">
-              <a:lnSpc>
-                <a:spcPts val="1680"/>
-              </a:lnSpc>
-              <a:spcBef>
-                <a:spcPts val="300"/>
-              </a:spcBef>
-              <a:spcAft>
-                <a:spcPts val="300"/>
-              </a:spcAft>
-              <a:buNone/>
-            </a:pPr>
-            <a:r>
-              <a:rPr lang="en-US" sz="1200" dirty="0">
-                <a:solidFill>
-                  <a:srgbClr val="1A1A1A"/>
-                </a:solidFill>
-                <a:latin typeface="Georgia" pitchFamily="34" charset="0"/>
-                <a:ea typeface="Georgia" pitchFamily="34" charset="-122"/>
-                <a:cs typeface="Georgia" pitchFamily="34" charset="-120"/>
-              </a:rPr>
-              <a:t>&gt; </a:t>
-            </a:r>
-            <a:pPr algn="l" indent="0" marL="0">
-              <a:lnSpc>
-                <a:spcPts val="1680"/>
-              </a:lnSpc>
-              <a:spcBef>
-                <a:spcPts val="300"/>
-              </a:spcBef>
-              <a:spcAft>
-                <a:spcPts val="300"/>
-              </a:spcAft>
-              <a:buNone/>
-            </a:pPr>
-            <a:r>
-              <a:rPr lang="en-US" sz="1200" i="1" dirty="0">
-                <a:solidFill>
-                  <a:srgbClr val="1A1A1A"/>
-                </a:solidFill>
-                <a:latin typeface="Georgia" pitchFamily="34" charset="0"/>
-                <a:ea typeface="Georgia" pitchFamily="34" charset="-122"/>
-                <a:cs typeface="Georgia" pitchFamily="34" charset="-120"/>
-              </a:rPr>
-              <a:t>tato dvandvānabhighātaḥ</a:t>
-            </a:r>
-            <a:pPr algn="l" indent="0" marL="0">
-              <a:lnSpc>
-                <a:spcPts val="1680"/>
-              </a:lnSpc>
-              <a:spcBef>
-                <a:spcPts val="300"/>
-              </a:spcBef>
-              <a:spcAft>
-                <a:spcPts val="300"/>
-              </a:spcAft>
-              <a:buNone/>
-            </a:pPr>
-            <a:r>
-              <a:rPr lang="en-US" sz="1200" dirty="0">
-                <a:solidFill>
-                  <a:srgbClr val="1A1A1A"/>
-                </a:solidFill>
-                <a:latin typeface="Georgia" pitchFamily="34" charset="0"/>
-                <a:ea typeface="Georgia" pitchFamily="34" charset="-122"/>
-                <a:cs typeface="Georgia" pitchFamily="34" charset="-120"/>
-              </a:rPr>
-              <a:t> &gt; "Then [the practitioner is] no longer afflicted by the pairs of opposites."</a:t>
-            </a:r>
-            <a:endParaRPr lang="en-US" sz="1200" dirty="0"/>
-          </a:p>
-        </p:txBody>
-      </p:sp>
-      <p:sp>
-        <p:nvSpPr>
-          <p:cNvPr id="13" name="Text 11"/>
-          <p:cNvSpPr/>
-          <p:nvPr/>
-        </p:nvSpPr>
-        <p:spPr>
-          <a:xfrm>
-            <a:off x="406301" y="4184452"/>
-            <a:ext cx="8498026" cy="213271"/>
-          </a:xfrm>
-          <a:prstGeom prst="rect">
-            <a:avLst/>
-          </a:prstGeom>
-          <a:noFill/>
-          <a:ln/>
-        </p:spPr>
-        <p:txBody>
-          <a:bodyPr wrap="square" lIns="0" tIns="0" rIns="0" bIns="0" rtlCol="0" anchor="t"/>
-          <a:lstStyle/>
-          <a:p>
-            <a:pPr algn="l" indent="0" marL="0">
-              <a:lnSpc>
-                <a:spcPts val="1680"/>
-              </a:lnSpc>
-              <a:spcBef>
-                <a:spcPts val="300"/>
-              </a:spcBef>
-              <a:spcAft>
-                <a:spcPts val="300"/>
-              </a:spcAft>
-              <a:buNone/>
-            </a:pPr>
-            <a:r>
-              <a:rPr lang="en-US" sz="1200" dirty="0">
-                <a:solidFill>
-                  <a:srgbClr val="1A1A1A"/>
-                </a:solidFill>
-                <a:latin typeface="Georgia" pitchFamily="34" charset="0"/>
-                <a:ea typeface="Georgia" pitchFamily="34" charset="-122"/>
-                <a:cs typeface="Georgia" pitchFamily="34" charset="-120"/>
-              </a:rPr>
-              <a:t>– Result: equanimity in the face of dualities (hot/cold, comfort/discomfort, etc.).</a:t>
-            </a:r>
-            <a:endParaRPr lang="en-US" sz="1200" dirty="0"/>
-          </a:p>
-        </p:txBody>
-      </p:sp>
-      <p:sp>
-        <p:nvSpPr>
-          <p:cNvPr id="14" name="Text 12"/>
-          <p:cNvSpPr/>
-          <p:nvPr/>
-        </p:nvSpPr>
-        <p:spPr>
-          <a:xfrm>
-            <a:off x="406301" y="4550122"/>
+            <a:off x="406301" y="4434929"/>
             <a:ext cx="8498026" cy="213271"/>
           </a:xfrm>
           <a:prstGeom prst="rect">
@@ -4139,7 +5187,7 @@
                 <a:ea typeface="Times New Roman" pitchFamily="34" charset="-122"/>
                 <a:cs typeface="Times New Roman" pitchFamily="34" charset="-120"/>
               </a:rPr>
-              <a:t>Practice (15 min) — Test the definition</a:t>
+              <a:t>Reading (15 min)</a:t>
             </a:r>
             <a:endParaRPr lang="en-US" sz="1800" dirty="0"/>
           </a:p>
@@ -4153,8 +5201,8 @@
         </p:nvSpPr>
         <p:spPr>
           <a:xfrm>
-            <a:off x="406301" y="870942"/>
-            <a:ext cx="8498026" cy="213271"/>
+            <a:off x="634901" y="883593"/>
+            <a:ext cx="8102798" cy="281880"/>
           </a:xfrm>
           <a:prstGeom prst="rect">
             <a:avLst/>
@@ -4166,20 +5214,18 @@
           <a:bodyPr wrap="square" lIns="0" tIns="0" rIns="0" bIns="0" rtlCol="0" anchor="t"/>
           <a:lstStyle/>
           <a:p>
-            <a:pPr algn="l" indent="0" marL="0">
-              <a:lnSpc>
-                <a:spcPts val="1680"/>
-              </a:lnSpc>
-              <a:spcBef>
-                <a:spcPts val="300"/>
-              </a:spcBef>
-              <a:spcAft>
-                <a:spcPts val="300"/>
-              </a:spcAft>
-              <a:buNone/>
-            </a:pPr>
-            <a:r>
-              <a:rPr lang="en-US" sz="1200" dirty="0">
+            <a:pPr algn="l" marL="342900" indent="-342900">
+              <a:lnSpc>
+                <a:spcPts val="1620"/>
+              </a:lnSpc>
+              <a:spcAft>
+                <a:spcPts val="300"/>
+              </a:spcAft>
+              <a:buSzPct val="100000"/>
+              <a:buChar char="•"/>
+            </a:pPr>
+            <a:r>
+              <a:rPr lang="en-US" sz="1200" b="1" dirty="0">
                 <a:solidFill>
                   <a:srgbClr val="1A1A1A"/>
                 </a:solidFill>
@@ -4187,11 +5233,89 @@
                 <a:ea typeface="Georgia" pitchFamily="34" charset="-122"/>
                 <a:cs typeface="Georgia" pitchFamily="34" charset="-120"/>
               </a:rPr>
-              <a:t>Hold tāḍāsana for 60 sec. Notice: – Are you </a:t>
-            </a:r>
+              <a:t>YS 2.46:</a:t>
+            </a:r>
+            <a:endParaRPr lang="en-US" sz="1200" dirty="0"/>
+          </a:p>
+        </p:txBody>
+      </p:sp>
+      <p:sp>
+        <p:nvSpPr>
+          <p:cNvPr id="5" name="Text 3"/>
+          <p:cNvSpPr/>
+          <p:nvPr/>
+        </p:nvSpPr>
+        <p:spPr>
+          <a:xfrm>
+            <a:off x="406301" y="1266974"/>
+            <a:ext cx="8331398" cy="611981"/>
+          </a:xfrm>
+          <a:prstGeom prst="rect">
+            <a:avLst/>
+          </a:prstGeom>
+          <a:solidFill>
+            <a:srgbClr val="FFFFFF"/>
+          </a:solidFill>
+          <a:ln/>
+        </p:spPr>
+        <p:txBody>
+          <a:bodyPr wrap="square" rtlCol="0" anchor="ctr"/>
+          <a:lstStyle/>
+          <a:p>
+            <a:pPr indent="0" marL="0">
+              <a:buNone/>
+            </a:pPr>
+            <a:endParaRPr lang="en-US" dirty="0"/>
+          </a:p>
+        </p:txBody>
+      </p:sp>
+      <p:sp>
+        <p:nvSpPr>
+          <p:cNvPr id="6" name="Shape 4"/>
+          <p:cNvSpPr/>
+          <p:nvPr/>
+        </p:nvSpPr>
+        <p:spPr>
+          <a:xfrm>
+            <a:off x="434876" y="1266974"/>
+            <a:ext cx="0" cy="611981"/>
+          </a:xfrm>
+          <a:prstGeom prst="line">
+            <a:avLst/>
+          </a:prstGeom>
+          <a:noFill/>
+          <a:ln w="57150">
+            <a:solidFill>
+              <a:srgbClr val="997929"/>
+            </a:solidFill>
+            <a:prstDash val="solid"/>
+          </a:ln>
+        </p:spPr>
+      </p:sp>
+      <p:sp>
+        <p:nvSpPr>
+          <p:cNvPr id="7" name="Text 5"/>
+          <p:cNvSpPr/>
+          <p:nvPr/>
+        </p:nvSpPr>
+        <p:spPr>
+          <a:xfrm>
+            <a:off x="692051" y="1457474"/>
+            <a:ext cx="7973389" cy="230981"/>
+          </a:xfrm>
+          <a:prstGeom prst="rect">
+            <a:avLst/>
+          </a:prstGeom>
+          <a:noFill/>
+          <a:ln/>
+        </p:spPr>
+        <p:txBody>
+          <a:bodyPr wrap="square" lIns="0" tIns="0" rIns="0" bIns="0" rtlCol="0" anchor="t"/>
+          <a:lstStyle/>
+          <a:p>
             <a:pPr algn="l" indent="0" marL="0">
               <a:lnSpc>
-                <a:spcPts val="1680"/>
+                <a:spcPts val="1820"/>
               </a:lnSpc>
               <a:spcBef>
                 <a:spcPts val="300"/>
@@ -4202,7 +5326,76 @@
               <a:buNone/>
             </a:pPr>
             <a:r>
-              <a:rPr lang="en-US" sz="1200" i="1" dirty="0">
+              <a:rPr lang="en-US" sz="1300" i="1" dirty="0">
+                <a:solidFill>
+                  <a:srgbClr val="1A1A1A"/>
+                </a:solidFill>
+                <a:latin typeface="Times New Roman" pitchFamily="34" charset="0"/>
+                <a:ea typeface="Times New Roman" pitchFamily="34" charset="-122"/>
+                <a:cs typeface="Times New Roman" pitchFamily="34" charset="-120"/>
+              </a:rPr>
+              <a:t>sthira-sukham āsanam</a:t>
+            </a:r>
+            <a:pPr algn="l" indent="0" marL="0">
+              <a:lnSpc>
+                <a:spcPts val="1820"/>
+              </a:lnSpc>
+              <a:spcBef>
+                <a:spcPts val="300"/>
+              </a:spcBef>
+              <a:spcAft>
+                <a:spcPts val="300"/>
+              </a:spcAft>
+              <a:buNone/>
+            </a:pPr>
+            <a:r>
+              <a:rPr lang="en-US" sz="1300" dirty="0">
+                <a:solidFill>
+                  <a:srgbClr val="1A1A1A"/>
+                </a:solidFill>
+                <a:latin typeface="Times New Roman" pitchFamily="34" charset="0"/>
+                <a:ea typeface="Times New Roman" pitchFamily="34" charset="-122"/>
+                <a:cs typeface="Times New Roman" pitchFamily="34" charset="-120"/>
+              </a:rPr>
+              <a:t> "Posture should be steady and comfortable."</a:t>
+            </a:r>
+            <a:endParaRPr lang="en-US" sz="1300" dirty="0"/>
+          </a:p>
+        </p:txBody>
+      </p:sp>
+      <p:sp>
+        <p:nvSpPr>
+          <p:cNvPr id="8" name="Text 6"/>
+          <p:cNvSpPr/>
+          <p:nvPr/>
+        </p:nvSpPr>
+        <p:spPr>
+          <a:xfrm>
+            <a:off x="634901" y="1980456"/>
+            <a:ext cx="8102798" cy="281880"/>
+          </a:xfrm>
+          <a:prstGeom prst="rect">
+            <a:avLst/>
+          </a:prstGeom>
+          <a:noFill/>
+          <a:ln/>
+        </p:spPr>
+        <p:txBody>
+          <a:bodyPr wrap="square" lIns="0" tIns="0" rIns="0" bIns="0" rtlCol="0" anchor="t"/>
+          <a:lstStyle/>
+          <a:p>
+            <a:pPr algn="l" marL="342900" indent="-342900">
+              <a:lnSpc>
+                <a:spcPts val="1620"/>
+              </a:lnSpc>
+              <a:spcAft>
+                <a:spcPts val="300"/>
+              </a:spcAft>
+              <a:buSzPct val="100000"/>
+              <a:buChar char="•"/>
+            </a:pPr>
+            <a:r>
+              <a:rPr lang="en-US" sz="1200" dirty="0">
                 <a:solidFill>
                   <a:srgbClr val="1A1A1A"/>
                 </a:solidFill>
@@ -4210,22 +5403,19 @@
                 <a:ea typeface="Georgia" pitchFamily="34" charset="-122"/>
                 <a:cs typeface="Georgia" pitchFamily="34" charset="-120"/>
               </a:rPr>
-              <a:t>sthira</a:t>
+              <a:t>3 words. 3 Sanskrit words. </a:t>
             </a:r>
             <a:pPr algn="l" indent="0" marL="0">
               <a:lnSpc>
-                <a:spcPts val="1680"/>
-              </a:lnSpc>
-              <a:spcBef>
-                <a:spcPts val="300"/>
-              </a:spcBef>
-              <a:spcAft>
-                <a:spcPts val="300"/>
-              </a:spcAft>
-              <a:buNone/>
-            </a:pPr>
-            <a:r>
-              <a:rPr lang="en-US" sz="1200" dirty="0">
+                <a:spcPts val="1620"/>
+              </a:lnSpc>
+              <a:spcAft>
+                <a:spcPts val="300"/>
+              </a:spcAft>
+              <a:buNone/>
+            </a:pPr>
+            <a:r>
+              <a:rPr lang="en-US" sz="1200" i="1" dirty="0">
                 <a:solidFill>
                   <a:srgbClr val="1A1A1A"/>
                 </a:solidFill>
@@ -4233,22 +5423,19 @@
                 <a:ea typeface="Georgia" pitchFamily="34" charset="-122"/>
                 <a:cs typeface="Georgia" pitchFamily="34" charset="-120"/>
               </a:rPr>
-              <a:t> (steady)? – Are you </a:t>
+              <a:t>sthira</a:t>
             </a:r>
             <a:pPr algn="l" indent="0" marL="0">
               <a:lnSpc>
-                <a:spcPts val="1680"/>
-              </a:lnSpc>
-              <a:spcBef>
-                <a:spcPts val="300"/>
-              </a:spcBef>
-              <a:spcAft>
-                <a:spcPts val="300"/>
-              </a:spcAft>
-              <a:buNone/>
-            </a:pPr>
-            <a:r>
-              <a:rPr lang="en-US" sz="1200" i="1" dirty="0">
+                <a:spcPts val="1620"/>
+              </a:lnSpc>
+              <a:spcAft>
+                <a:spcPts val="300"/>
+              </a:spcAft>
+              <a:buNone/>
+            </a:pPr>
+            <a:r>
+              <a:rPr lang="en-US" sz="1200" dirty="0">
                 <a:solidFill>
                   <a:srgbClr val="1A1A1A"/>
                 </a:solidFill>
@@ -4256,22 +5443,19 @@
                 <a:ea typeface="Georgia" pitchFamily="34" charset="-122"/>
                 <a:cs typeface="Georgia" pitchFamily="34" charset="-120"/>
               </a:rPr>
-              <a:t>sukha</a:t>
+              <a:t> = steady, firm. </a:t>
             </a:r>
             <a:pPr algn="l" indent="0" marL="0">
               <a:lnSpc>
-                <a:spcPts val="1680"/>
-              </a:lnSpc>
-              <a:spcBef>
-                <a:spcPts val="300"/>
-              </a:spcBef>
-              <a:spcAft>
-                <a:spcPts val="300"/>
-              </a:spcAft>
-              <a:buNone/>
-            </a:pPr>
-            <a:r>
-              <a:rPr lang="en-US" sz="1200" dirty="0">
+                <a:spcPts val="1620"/>
+              </a:lnSpc>
+              <a:spcAft>
+                <a:spcPts val="300"/>
+              </a:spcAft>
+              <a:buNone/>
+            </a:pPr>
+            <a:r>
+              <a:rPr lang="en-US" sz="1200" i="1" dirty="0">
                 <a:solidFill>
                   <a:srgbClr val="1A1A1A"/>
                 </a:solidFill>
@@ -4279,40 +5463,12 @@
                 <a:ea typeface="Georgia" pitchFamily="34" charset="-122"/>
                 <a:cs typeface="Georgia" pitchFamily="34" charset="-120"/>
               </a:rPr>
-              <a:t> (comfortable)? – Are you both?</a:t>
-            </a:r>
-            <a:endParaRPr lang="en-US" sz="1200" dirty="0"/>
-          </a:p>
-        </p:txBody>
-      </p:sp>
-      <p:sp>
-        <p:nvSpPr>
-          <p:cNvPr id="5" name="Text 3"/>
-          <p:cNvSpPr/>
-          <p:nvPr/>
-        </p:nvSpPr>
-        <p:spPr>
-          <a:xfrm>
-            <a:off x="406301" y="1160413"/>
-            <a:ext cx="8498026" cy="213271"/>
-          </a:xfrm>
-          <a:prstGeom prst="rect">
-            <a:avLst/>
-          </a:prstGeom>
-          <a:noFill/>
-          <a:ln/>
-        </p:spPr>
-        <p:txBody>
-          <a:bodyPr wrap="square" lIns="0" tIns="0" rIns="0" bIns="0" rtlCol="0" anchor="t"/>
-          <a:lstStyle/>
-          <a:p>
+              <a:t>sukha</a:t>
+            </a:r>
             <a:pPr algn="l" indent="0" marL="0">
               <a:lnSpc>
-                <a:spcPts val="1680"/>
-              </a:lnSpc>
-              <a:spcBef>
-                <a:spcPts val="300"/>
-              </a:spcBef>
+                <a:spcPts val="1620"/>
+              </a:lnSpc>
               <a:spcAft>
                 <a:spcPts val="300"/>
               </a:spcAft>
@@ -4327,47 +5483,19 @@
                 <a:ea typeface="Georgia" pitchFamily="34" charset="-122"/>
                 <a:cs typeface="Georgia" pitchFamily="34" charset="-120"/>
               </a:rPr>
-              <a:t>Now hold vṛkṣāsana (right). Same questions.</a:t>
-            </a:r>
-            <a:endParaRPr lang="en-US" sz="1200" dirty="0"/>
-          </a:p>
-        </p:txBody>
-      </p:sp>
-      <p:sp>
-        <p:nvSpPr>
-          <p:cNvPr id="6" name="Text 4"/>
-          <p:cNvSpPr/>
-          <p:nvPr/>
-        </p:nvSpPr>
-        <p:spPr>
-          <a:xfrm>
-            <a:off x="406301" y="1449884"/>
-            <a:ext cx="8498026" cy="213271"/>
-          </a:xfrm>
-          <a:prstGeom prst="rect">
-            <a:avLst/>
-          </a:prstGeom>
-          <a:noFill/>
-          <a:ln/>
-        </p:spPr>
-        <p:txBody>
-          <a:bodyPr wrap="square" lIns="0" tIns="0" rIns="0" bIns="0" rtlCol="0" anchor="t"/>
-          <a:lstStyle/>
-          <a:p>
+              <a:t> = comfortable, easeful. </a:t>
+            </a:r>
             <a:pPr algn="l" indent="0" marL="0">
               <a:lnSpc>
-                <a:spcPts val="1680"/>
-              </a:lnSpc>
-              <a:spcBef>
-                <a:spcPts val="300"/>
-              </a:spcBef>
-              <a:spcAft>
-                <a:spcPts val="300"/>
-              </a:spcAft>
-              <a:buNone/>
-            </a:pPr>
-            <a:r>
-              <a:rPr lang="en-US" sz="1200" dirty="0">
+                <a:spcPts val="1620"/>
+              </a:lnSpc>
+              <a:spcAft>
+                <a:spcPts val="300"/>
+              </a:spcAft>
+              <a:buNone/>
+            </a:pPr>
+            <a:r>
+              <a:rPr lang="en-US" sz="1200" i="1" dirty="0">
                 <a:solidFill>
                   <a:srgbClr val="1A1A1A"/>
                 </a:solidFill>
@@ -4375,40 +5503,12 @@
                 <a:ea typeface="Georgia" pitchFamily="34" charset="-122"/>
                 <a:cs typeface="Georgia" pitchFamily="34" charset="-120"/>
               </a:rPr>
-              <a:t>Then balāsana for 90 sec. Same questions.</a:t>
-            </a:r>
-            <a:endParaRPr lang="en-US" sz="1200" dirty="0"/>
-          </a:p>
-        </p:txBody>
-      </p:sp>
-      <p:sp>
-        <p:nvSpPr>
-          <p:cNvPr id="7" name="Text 5"/>
-          <p:cNvSpPr/>
-          <p:nvPr/>
-        </p:nvSpPr>
-        <p:spPr>
-          <a:xfrm>
-            <a:off x="406301" y="1739354"/>
-            <a:ext cx="8498026" cy="213271"/>
-          </a:xfrm>
-          <a:prstGeom prst="rect">
-            <a:avLst/>
-          </a:prstGeom>
-          <a:noFill/>
-          <a:ln/>
-        </p:spPr>
-        <p:txBody>
-          <a:bodyPr wrap="square" lIns="0" tIns="0" rIns="0" bIns="0" rtlCol="0" anchor="t"/>
-          <a:lstStyle/>
-          <a:p>
+              <a:t>āsanam</a:t>
+            </a:r>
             <a:pPr algn="l" indent="0" marL="0">
               <a:lnSpc>
-                <a:spcPts val="1680"/>
-              </a:lnSpc>
-              <a:spcBef>
-                <a:spcPts val="300"/>
-              </a:spcBef>
+                <a:spcPts val="1620"/>
+              </a:lnSpc>
               <a:spcAft>
                 <a:spcPts val="300"/>
               </a:spcAft>
@@ -4423,7 +5523,7 @@
                 <a:ea typeface="Georgia" pitchFamily="34" charset="-122"/>
                 <a:cs typeface="Georgia" pitchFamily="34" charset="-120"/>
               </a:rPr>
-              <a:t>Discussion (in pairs, 2 min): which pose best met Patañjali's dual criterion for you, today?</a:t>
+              <a:t> = posture.</a:t>
             </a:r>
             <a:endParaRPr lang="en-US" sz="1200" dirty="0"/>
           </a:p>
@@ -4431,7 +5531,7 @@
       </p:sp>
       <p:sp>
         <p:nvSpPr>
-          <p:cNvPr id="8" name="Text 6"/>
+          <p:cNvPr id="9" name="Text 7"/>
           <p:cNvSpPr/>
           <p:nvPr/>
         </p:nvSpPr>
@@ -4581,7 +5681,7 @@
                 <a:ea typeface="Times New Roman" pitchFamily="34" charset="-122"/>
                 <a:cs typeface="Times New Roman" pitchFamily="34" charset="-120"/>
               </a:rPr>
-              <a:t>Reflection writing (8 min)</a:t>
+              <a:t>Reading (15 min) (cont.)</a:t>
             </a:r>
             <a:endParaRPr lang="en-US" sz="1800" dirty="0"/>
           </a:p>
@@ -4595,8 +5695,8 @@
         </p:nvSpPr>
         <p:spPr>
           <a:xfrm>
-            <a:off x="406301" y="870942"/>
-            <a:ext cx="8498026" cy="426541"/>
+            <a:off x="634901" y="883593"/>
+            <a:ext cx="8102798" cy="281880"/>
           </a:xfrm>
           <a:prstGeom prst="rect">
             <a:avLst/>
@@ -4608,17 +5708,15 @@
           <a:bodyPr wrap="square" lIns="0" tIns="0" rIns="0" bIns="0" rtlCol="0" anchor="t"/>
           <a:lstStyle/>
           <a:p>
-            <a:pPr algn="l" indent="0" marL="0">
-              <a:lnSpc>
-                <a:spcPts val="1680"/>
-              </a:lnSpc>
-              <a:spcBef>
-                <a:spcPts val="300"/>
-              </a:spcBef>
-              <a:spcAft>
-                <a:spcPts val="300"/>
-              </a:spcAft>
-              <a:buNone/>
+            <a:pPr algn="l" marL="342900" indent="-342900">
+              <a:lnSpc>
+                <a:spcPts val="1620"/>
+              </a:lnSpc>
+              <a:spcAft>
+                <a:spcPts val="300"/>
+              </a:spcAft>
+              <a:buSzPct val="100000"/>
+              <a:buChar char="•"/>
             </a:pPr>
             <a:r>
               <a:rPr lang="en-US" sz="1200" dirty="0">
@@ -4629,22 +5727,45 @@
                 <a:ea typeface="Georgia" pitchFamily="34" charset="-122"/>
                 <a:cs typeface="Georgia" pitchFamily="34" charset="-120"/>
               </a:rPr>
-              <a:t>5-minute quick-write: </a:t>
-            </a:r>
-            <a:pPr algn="l" indent="0" marL="0">
-              <a:lnSpc>
-                <a:spcPts val="1680"/>
-              </a:lnSpc>
-              <a:spcBef>
-                <a:spcPts val="300"/>
-              </a:spcBef>
-              <a:spcAft>
-                <a:spcPts val="300"/>
-              </a:spcAft>
-              <a:buNone/>
-            </a:pPr>
-            <a:r>
-              <a:rPr lang="en-US" sz="1200" i="1" dirty="0">
+              <a:t>The dual condition: BOTH steady AND comfortable. Not steady-but-uncomfortable. Not comfortable-but-collapsing.</a:t>
+            </a:r>
+            <a:endParaRPr lang="en-US" sz="1200" dirty="0"/>
+          </a:p>
+        </p:txBody>
+      </p:sp>
+      <p:sp>
+        <p:nvSpPr>
+          <p:cNvPr id="5" name="Text 3"/>
+          <p:cNvSpPr/>
+          <p:nvPr/>
+        </p:nvSpPr>
+        <p:spPr>
+          <a:xfrm>
+            <a:off x="634901" y="1266974"/>
+            <a:ext cx="8102798" cy="281880"/>
+          </a:xfrm>
+          <a:prstGeom prst="rect">
+            <a:avLst/>
+          </a:prstGeom>
+          <a:noFill/>
+          <a:ln/>
+        </p:spPr>
+        <p:txBody>
+          <a:bodyPr wrap="square" lIns="0" tIns="0" rIns="0" bIns="0" rtlCol="0" anchor="t"/>
+          <a:lstStyle/>
+          <a:p>
+            <a:pPr algn="l" marL="342900" indent="-342900">
+              <a:lnSpc>
+                <a:spcPts val="1620"/>
+              </a:lnSpc>
+              <a:spcAft>
+                <a:spcPts val="300"/>
+              </a:spcAft>
+              <a:buSzPct val="100000"/>
+              <a:buChar char="•"/>
+            </a:pPr>
+            <a:r>
+              <a:rPr lang="en-US" sz="1200" b="1" dirty="0">
                 <a:solidFill>
                   <a:srgbClr val="1A1A1A"/>
                 </a:solidFill>
@@ -4652,7 +5773,7 @@
                 <a:ea typeface="Georgia" pitchFamily="34" charset="-122"/>
                 <a:cs typeface="Georgia" pitchFamily="34" charset="-120"/>
               </a:rPr>
-              <a:t>"Does modern postural yoga, with its emphasis on advanced and challenging poses, actually meet Patañjali's criterion of steady AND comfortable? Argue your position in 4–5 sentences."</a:t>
+              <a:t>YS 2.47:</a:t>
             </a:r>
             <a:endParaRPr lang="en-US" sz="1200" dirty="0"/>
           </a:p>
@@ -4660,7 +5781,131 @@
       </p:sp>
       <p:sp>
         <p:nvSpPr>
-          <p:cNvPr id="5" name="Text 3"/>
+          <p:cNvPr id="6" name="Text 4"/>
+          <p:cNvSpPr/>
+          <p:nvPr/>
+        </p:nvSpPr>
+        <p:spPr>
+          <a:xfrm>
+            <a:off x="406301" y="1650355"/>
+            <a:ext cx="8331398" cy="842963"/>
+          </a:xfrm>
+          <a:prstGeom prst="rect">
+            <a:avLst/>
+          </a:prstGeom>
+          <a:solidFill>
+            <a:srgbClr val="FFFFFF"/>
+          </a:solidFill>
+          <a:ln/>
+        </p:spPr>
+        <p:txBody>
+          <a:bodyPr wrap="square" rtlCol="0" anchor="ctr"/>
+          <a:lstStyle/>
+          <a:p>
+            <a:pPr indent="0" marL="0">
+              <a:buNone/>
+            </a:pPr>
+            <a:endParaRPr lang="en-US" dirty="0"/>
+          </a:p>
+        </p:txBody>
+      </p:sp>
+      <p:sp>
+        <p:nvSpPr>
+          <p:cNvPr id="7" name="Shape 5"/>
+          <p:cNvSpPr/>
+          <p:nvPr/>
+        </p:nvSpPr>
+        <p:spPr>
+          <a:xfrm>
+            <a:off x="434876" y="1650355"/>
+            <a:ext cx="0" cy="842963"/>
+          </a:xfrm>
+          <a:prstGeom prst="line">
+            <a:avLst/>
+          </a:prstGeom>
+          <a:noFill/>
+          <a:ln w="57150">
+            <a:solidFill>
+              <a:srgbClr val="997929"/>
+            </a:solidFill>
+            <a:prstDash val="solid"/>
+          </a:ln>
+        </p:spPr>
+      </p:sp>
+      <p:sp>
+        <p:nvSpPr>
+          <p:cNvPr id="8" name="Text 6"/>
+          <p:cNvSpPr/>
+          <p:nvPr/>
+        </p:nvSpPr>
+        <p:spPr>
+          <a:xfrm>
+            <a:off x="692051" y="1840855"/>
+            <a:ext cx="7973389" cy="461963"/>
+          </a:xfrm>
+          <a:prstGeom prst="rect">
+            <a:avLst/>
+          </a:prstGeom>
+          <a:noFill/>
+          <a:ln/>
+        </p:spPr>
+        <p:txBody>
+          <a:bodyPr wrap="square" lIns="0" tIns="0" rIns="0" bIns="0" rtlCol="0" anchor="t"/>
+          <a:lstStyle/>
+          <a:p>
+            <a:pPr algn="l" indent="0" marL="0">
+              <a:lnSpc>
+                <a:spcPts val="1820"/>
+              </a:lnSpc>
+              <a:spcBef>
+                <a:spcPts val="300"/>
+              </a:spcBef>
+              <a:spcAft>
+                <a:spcPts val="300"/>
+              </a:spcAft>
+              <a:buNone/>
+            </a:pPr>
+            <a:r>
+              <a:rPr lang="en-US" sz="1300" i="1" dirty="0">
+                <a:solidFill>
+                  <a:srgbClr val="1A1A1A"/>
+                </a:solidFill>
+                <a:latin typeface="Times New Roman" pitchFamily="34" charset="0"/>
+                <a:ea typeface="Times New Roman" pitchFamily="34" charset="-122"/>
+                <a:cs typeface="Times New Roman" pitchFamily="34" charset="-120"/>
+              </a:rPr>
+              <a:t>prayatna-śaithilyānanta-samāpattibhyām</a:t>
+            </a:r>
+            <a:pPr algn="l" indent="0" marL="0">
+              <a:lnSpc>
+                <a:spcPts val="1820"/>
+              </a:lnSpc>
+              <a:spcBef>
+                <a:spcPts val="300"/>
+              </a:spcBef>
+              <a:spcAft>
+                <a:spcPts val="300"/>
+              </a:spcAft>
+              <a:buNone/>
+            </a:pPr>
+            <a:r>
+              <a:rPr lang="en-US" sz="1300" dirty="0">
+                <a:solidFill>
+                  <a:srgbClr val="1A1A1A"/>
+                </a:solidFill>
+                <a:latin typeface="Times New Roman" pitchFamily="34" charset="0"/>
+                <a:ea typeface="Times New Roman" pitchFamily="34" charset="-122"/>
+                <a:cs typeface="Times New Roman" pitchFamily="34" charset="-120"/>
+              </a:rPr>
+              <a:t> "[Sthira-sukham is achieved] through the relaxation of effort and absorption into the infinite."</a:t>
+            </a:r>
+            <a:endParaRPr lang="en-US" sz="1300" dirty="0"/>
+          </a:p>
+        </p:txBody>
+      </p:sp>
+      <p:sp>
+        <p:nvSpPr>
+          <p:cNvPr id="9" name="Text 7"/>
           <p:cNvSpPr/>
           <p:nvPr/>
         </p:nvSpPr>
@@ -4810,7 +6055,7 @@
                 <a:ea typeface="Times New Roman" pitchFamily="34" charset="-122"/>
                 <a:cs typeface="Times New Roman" pitchFamily="34" charset="-120"/>
               </a:rPr>
-              <a:t>Wrap-up (4 min)</a:t>
+              <a:t>Reading (15 min) (cont.)</a:t>
             </a:r>
             <a:endParaRPr lang="en-US" sz="1800" dirty="0"/>
           </a:p>
@@ -4824,8 +6069,8 @@
         </p:nvSpPr>
         <p:spPr>
           <a:xfrm>
-            <a:off x="406301" y="870942"/>
-            <a:ext cx="8498026" cy="426541"/>
+            <a:off x="634901" y="883593"/>
+            <a:ext cx="8102798" cy="487561"/>
           </a:xfrm>
           <a:prstGeom prst="rect">
             <a:avLst/>
@@ -4837,17 +6082,15 @@
           <a:bodyPr wrap="square" lIns="0" tIns="0" rIns="0" bIns="0" rtlCol="0" anchor="t"/>
           <a:lstStyle/>
           <a:p>
-            <a:pPr algn="l" indent="0" marL="0">
-              <a:lnSpc>
-                <a:spcPts val="1680"/>
-              </a:lnSpc>
-              <a:spcBef>
-                <a:spcPts val="300"/>
-              </a:spcBef>
-              <a:spcAft>
-                <a:spcPts val="300"/>
-              </a:spcAft>
-              <a:buNone/>
+            <a:pPr algn="l" marL="342900" indent="-342900">
+              <a:lnSpc>
+                <a:spcPts val="1620"/>
+              </a:lnSpc>
+              <a:spcAft>
+                <a:spcPts val="300"/>
+              </a:spcAft>
+              <a:buSzPct val="100000"/>
+              <a:buChar char="•"/>
             </a:pPr>
             <a:r>
               <a:rPr lang="en-US" sz="1200" dirty="0">
@@ -4858,15 +6101,12 @@
                 <a:ea typeface="Georgia" pitchFamily="34" charset="-122"/>
                 <a:cs typeface="Georgia" pitchFamily="34" charset="-120"/>
               </a:rPr>
-              <a:t>– 2 students share their position. – Preview Day 4: </a:t>
+              <a:t>Two means to the dual condition: </a:t>
             </a:r>
             <a:pPr algn="l" indent="0" marL="0">
               <a:lnSpc>
-                <a:spcPts val="1680"/>
-              </a:lnSpc>
-              <a:spcBef>
-                <a:spcPts val="300"/>
-              </a:spcBef>
+                <a:spcPts val="1620"/>
+              </a:lnSpc>
               <a:spcAft>
                 <a:spcPts val="300"/>
               </a:spcAft>
@@ -4881,7 +6121,67 @@
                 <a:ea typeface="Georgia" pitchFamily="34" charset="-122"/>
                 <a:cs typeface="Georgia" pitchFamily="34" charset="-120"/>
               </a:rPr>
-              <a:t>"Tomorrow — Sūrya Namaskāra. And a surprising historical question about its age."</a:t>
+              <a:t>prayatna-śaithilya</a:t>
+            </a:r>
+            <a:pPr algn="l" indent="0" marL="0">
+              <a:lnSpc>
+                <a:spcPts val="1620"/>
+              </a:lnSpc>
+              <a:spcAft>
+                <a:spcPts val="300"/>
+              </a:spcAft>
+              <a:buNone/>
+            </a:pPr>
+            <a:r>
+              <a:rPr lang="en-US" sz="1200" dirty="0">
+                <a:solidFill>
+                  <a:srgbClr val="1A1A1A"/>
+                </a:solidFill>
+                <a:latin typeface="Georgia" pitchFamily="34" charset="0"/>
+                <a:ea typeface="Georgia" pitchFamily="34" charset="-122"/>
+                <a:cs typeface="Georgia" pitchFamily="34" charset="-120"/>
+              </a:rPr>
+              <a:t> (relaxing effort) and </a:t>
+            </a:r>
+            <a:pPr algn="l" indent="0" marL="0">
+              <a:lnSpc>
+                <a:spcPts val="1620"/>
+              </a:lnSpc>
+              <a:spcAft>
+                <a:spcPts val="300"/>
+              </a:spcAft>
+              <a:buNone/>
+            </a:pPr>
+            <a:r>
+              <a:rPr lang="en-US" sz="1200" i="1" dirty="0">
+                <a:solidFill>
+                  <a:srgbClr val="1A1A1A"/>
+                </a:solidFill>
+                <a:latin typeface="Georgia" pitchFamily="34" charset="0"/>
+                <a:ea typeface="Georgia" pitchFamily="34" charset="-122"/>
+                <a:cs typeface="Georgia" pitchFamily="34" charset="-120"/>
+              </a:rPr>
+              <a:t>ananta-samāpatti</a:t>
+            </a:r>
+            <a:pPr algn="l" indent="0" marL="0">
+              <a:lnSpc>
+                <a:spcPts val="1620"/>
+              </a:lnSpc>
+              <a:spcAft>
+                <a:spcPts val="300"/>
+              </a:spcAft>
+              <a:buNone/>
+            </a:pPr>
+            <a:r>
+              <a:rPr lang="en-US" sz="1200" dirty="0">
+                <a:solidFill>
+                  <a:srgbClr val="1A1A1A"/>
+                </a:solidFill>
+                <a:latin typeface="Georgia" pitchFamily="34" charset="0"/>
+                <a:ea typeface="Georgia" pitchFamily="34" charset="-122"/>
+                <a:cs typeface="Georgia" pitchFamily="34" charset="-120"/>
+              </a:rPr>
+              <a:t> (absorption into the infinite / the limitless).</a:t>
             </a:r>
             <a:endParaRPr lang="en-US" sz="1200" dirty="0"/>
           </a:p>
@@ -4890,6 +6190,176 @@
       <p:sp>
         <p:nvSpPr>
           <p:cNvPr id="5" name="Text 3"/>
+          <p:cNvSpPr/>
+          <p:nvPr/>
+        </p:nvSpPr>
+        <p:spPr>
+          <a:xfrm>
+            <a:off x="634901" y="1472654"/>
+            <a:ext cx="8102798" cy="281880"/>
+          </a:xfrm>
+          <a:prstGeom prst="rect">
+            <a:avLst/>
+          </a:prstGeom>
+          <a:noFill/>
+          <a:ln/>
+        </p:spPr>
+        <p:txBody>
+          <a:bodyPr wrap="square" lIns="0" tIns="0" rIns="0" bIns="0" rtlCol="0" anchor="t"/>
+          <a:lstStyle/>
+          <a:p>
+            <a:pPr algn="l" marL="342900" indent="-342900">
+              <a:lnSpc>
+                <a:spcPts val="1620"/>
+              </a:lnSpc>
+              <a:spcAft>
+                <a:spcPts val="300"/>
+              </a:spcAft>
+              <a:buSzPct val="100000"/>
+              <a:buChar char="•"/>
+            </a:pPr>
+            <a:r>
+              <a:rPr lang="en-US" sz="1200" b="1" dirty="0">
+                <a:solidFill>
+                  <a:srgbClr val="1A1A1A"/>
+                </a:solidFill>
+                <a:latin typeface="Georgia" pitchFamily="34" charset="0"/>
+                <a:ea typeface="Georgia" pitchFamily="34" charset="-122"/>
+                <a:cs typeface="Georgia" pitchFamily="34" charset="-120"/>
+              </a:rPr>
+              <a:t>YS 2.48:</a:t>
+            </a:r>
+            <a:endParaRPr lang="en-US" sz="1200" dirty="0"/>
+          </a:p>
+        </p:txBody>
+      </p:sp>
+      <p:sp>
+        <p:nvSpPr>
+          <p:cNvPr id="6" name="Text 4"/>
+          <p:cNvSpPr/>
+          <p:nvPr/>
+        </p:nvSpPr>
+        <p:spPr>
+          <a:xfrm>
+            <a:off x="406301" y="1856036"/>
+            <a:ext cx="8331398" cy="611981"/>
+          </a:xfrm>
+          <a:prstGeom prst="rect">
+            <a:avLst/>
+          </a:prstGeom>
+          <a:solidFill>
+            <a:srgbClr val="FFFFFF"/>
+          </a:solidFill>
+          <a:ln/>
+        </p:spPr>
+        <p:txBody>
+          <a:bodyPr wrap="square" rtlCol="0" anchor="ctr"/>
+          <a:lstStyle/>
+          <a:p>
+            <a:pPr indent="0" marL="0">
+              <a:buNone/>
+            </a:pPr>
+            <a:endParaRPr lang="en-US" dirty="0"/>
+          </a:p>
+        </p:txBody>
+      </p:sp>
+      <p:sp>
+        <p:nvSpPr>
+          <p:cNvPr id="7" name="Shape 5"/>
+          <p:cNvSpPr/>
+          <p:nvPr/>
+        </p:nvSpPr>
+        <p:spPr>
+          <a:xfrm>
+            <a:off x="434876" y="1856036"/>
+            <a:ext cx="0" cy="611981"/>
+          </a:xfrm>
+          <a:prstGeom prst="line">
+            <a:avLst/>
+          </a:prstGeom>
+          <a:noFill/>
+          <a:ln w="57150">
+            <a:solidFill>
+              <a:srgbClr val="997929"/>
+            </a:solidFill>
+            <a:prstDash val="solid"/>
+          </a:ln>
+        </p:spPr>
+      </p:sp>
+      <p:sp>
+        <p:nvSpPr>
+          <p:cNvPr id="8" name="Text 6"/>
+          <p:cNvSpPr/>
+          <p:nvPr/>
+        </p:nvSpPr>
+        <p:spPr>
+          <a:xfrm>
+            <a:off x="692051" y="2046536"/>
+            <a:ext cx="7973389" cy="230981"/>
+          </a:xfrm>
+          <a:prstGeom prst="rect">
+            <a:avLst/>
+          </a:prstGeom>
+          <a:noFill/>
+          <a:ln/>
+        </p:spPr>
+        <p:txBody>
+          <a:bodyPr wrap="square" lIns="0" tIns="0" rIns="0" bIns="0" rtlCol="0" anchor="t"/>
+          <a:lstStyle/>
+          <a:p>
+            <a:pPr algn="l" indent="0" marL="0">
+              <a:lnSpc>
+                <a:spcPts val="1820"/>
+              </a:lnSpc>
+              <a:spcBef>
+                <a:spcPts val="300"/>
+              </a:spcBef>
+              <a:spcAft>
+                <a:spcPts val="300"/>
+              </a:spcAft>
+              <a:buNone/>
+            </a:pPr>
+            <a:r>
+              <a:rPr lang="en-US" sz="1300" i="1" dirty="0">
+                <a:solidFill>
+                  <a:srgbClr val="1A1A1A"/>
+                </a:solidFill>
+                <a:latin typeface="Times New Roman" pitchFamily="34" charset="0"/>
+                <a:ea typeface="Times New Roman" pitchFamily="34" charset="-122"/>
+                <a:cs typeface="Times New Roman" pitchFamily="34" charset="-120"/>
+              </a:rPr>
+              <a:t>tato dvandvānabhighātaḥ</a:t>
+            </a:r>
+            <a:pPr algn="l" indent="0" marL="0">
+              <a:lnSpc>
+                <a:spcPts val="1820"/>
+              </a:lnSpc>
+              <a:spcBef>
+                <a:spcPts val="300"/>
+              </a:spcBef>
+              <a:spcAft>
+                <a:spcPts val="300"/>
+              </a:spcAft>
+              <a:buNone/>
+            </a:pPr>
+            <a:r>
+              <a:rPr lang="en-US" sz="1300" dirty="0">
+                <a:solidFill>
+                  <a:srgbClr val="1A1A1A"/>
+                </a:solidFill>
+                <a:latin typeface="Times New Roman" pitchFamily="34" charset="0"/>
+                <a:ea typeface="Times New Roman" pitchFamily="34" charset="-122"/>
+                <a:cs typeface="Times New Roman" pitchFamily="34" charset="-120"/>
+              </a:rPr>
+              <a:t> "Then [the practitioner is] no longer afflicted by the pairs of opposites."</a:t>
+            </a:r>
+            <a:endParaRPr lang="en-US" sz="1300" dirty="0"/>
+          </a:p>
+        </p:txBody>
+      </p:sp>
+      <p:sp>
+        <p:nvSpPr>
+          <p:cNvPr id="9" name="Text 7"/>
           <p:cNvSpPr/>
           <p:nvPr/>
         </p:nvSpPr>
@@ -5039,7 +6509,7 @@
                 <a:ea typeface="Times New Roman" pitchFamily="34" charset="-122"/>
                 <a:cs typeface="Times New Roman" pitchFamily="34" charset="-120"/>
               </a:rPr>
-              <a:t>Differentiation</a:t>
+              <a:t>Reading (15 min) (cont.)</a:t>
             </a:r>
             <a:endParaRPr lang="en-US" sz="1800" dirty="0"/>
           </a:p>
@@ -5054,7 +6524,7 @@
         <p:spPr>
           <a:xfrm>
             <a:off x="634901" y="883593"/>
-            <a:ext cx="8102798" cy="525661"/>
+            <a:ext cx="8102798" cy="281880"/>
           </a:xfrm>
           <a:prstGeom prst="rect">
             <a:avLst/>
@@ -5077,7 +6547,7 @@
               <a:buChar char="•"/>
             </a:pPr>
             <a:r>
-              <a:rPr lang="en-US" sz="1200" b="1" dirty="0">
+              <a:rPr lang="en-US" sz="1200" dirty="0">
                 <a:solidFill>
                   <a:srgbClr val="1A1A1A"/>
                 </a:solidFill>
@@ -5085,71 +6555,7 @@
                 <a:ea typeface="Georgia" pitchFamily="34" charset="-122"/>
                 <a:cs typeface="Georgia" pitchFamily="34" charset="-120"/>
               </a:rPr>
-              <a:t>Tier up:</a:t>
-            </a:r>
-            <a:pPr algn="l" indent="0" marL="0">
-              <a:lnSpc>
-                <a:spcPts val="1620"/>
-              </a:lnSpc>
-              <a:spcAft>
-                <a:spcPts val="300"/>
-              </a:spcAft>
-              <a:buNone/>
-            </a:pPr>
-            <a:r>
-              <a:rPr lang="en-US" sz="1200" dirty="0">
-                <a:solidFill>
-                  <a:srgbClr val="1A1A1A"/>
-                </a:solidFill>
-                <a:latin typeface="Georgia" pitchFamily="34" charset="0"/>
-                <a:ea typeface="Georgia" pitchFamily="34" charset="-122"/>
-                <a:cs typeface="Georgia" pitchFamily="34" charset="-120"/>
-              </a:rPr>
-              <a:t> Read Bryant's full commentary on YS 2.46–48. Bring 1 question.</a:t>
-            </a:r>
-            <a:endParaRPr lang="en-US" sz="1200" dirty="0"/>
-          </a:p>
-          <a:p>
-            <a:pPr algn="l" marL="342900" indent="-342900">
-              <a:lnSpc>
-                <a:spcPts val="1620"/>
-              </a:lnSpc>
-              <a:spcAft>
-                <a:spcPts val="300"/>
-              </a:spcAft>
-              <a:buSzPct val="100000"/>
-              <a:buChar char="•"/>
-            </a:pPr>
-            <a:r>
-              <a:rPr lang="en-US" sz="1200" b="1" dirty="0">
-                <a:solidFill>
-                  <a:srgbClr val="1A1A1A"/>
-                </a:solidFill>
-                <a:latin typeface="Georgia" pitchFamily="34" charset="0"/>
-                <a:ea typeface="Georgia" pitchFamily="34" charset="-122"/>
-                <a:cs typeface="Georgia" pitchFamily="34" charset="-120"/>
-              </a:rPr>
-              <a:t>Tier down:</a:t>
-            </a:r>
-            <a:pPr algn="l" indent="0" marL="0">
-              <a:lnSpc>
-                <a:spcPts val="1620"/>
-              </a:lnSpc>
-              <a:spcAft>
-                <a:spcPts val="300"/>
-              </a:spcAft>
-              <a:buNone/>
-            </a:pPr>
-            <a:r>
-              <a:rPr lang="en-US" sz="1200" dirty="0">
-                <a:solidFill>
-                  <a:srgbClr val="1A1A1A"/>
-                </a:solidFill>
-                <a:latin typeface="Georgia" pitchFamily="34" charset="0"/>
-                <a:ea typeface="Georgia" pitchFamily="34" charset="-122"/>
-                <a:cs typeface="Georgia" pitchFamily="34" charset="-120"/>
-              </a:rPr>
-              <a:t> Focus on memorising YS 2.46 in Sanskrit (3 words).</a:t>
+              <a:t>Result: equanimity in the face of dualities (hot/cold, comfort/discomfort, etc.).</a:t>
             </a:r>
             <a:endParaRPr lang="en-US" sz="1200" dirty="0"/>
           </a:p>
